--- a/figuras/figuras_TFM.pptx
+++ b/figuras/figuras_TFM.pptx
@@ -217,7 +217,7 @@
           <a:p>
             <a:fld id="{AF9A20B9-A399-4C45-9BE2-CC640EA84D56}" type="datetimeFigureOut">
               <a:rPr lang="es-ES" smtClean="0"/>
-              <a:t>22/06/2025</a:t>
+              <a:t>07/07/2025</a:t>
             </a:fld>
             <a:endParaRPr lang="es-ES"/>
           </a:p>
@@ -867,7 +867,7 @@
           <a:p>
             <a:fld id="{14765AC1-0663-8843-9B78-7432E893FF9C}" type="datetimeFigureOut">
               <a:rPr lang="es-ES" smtClean="0"/>
-              <a:t>22/06/2025</a:t>
+              <a:t>07/07/2025</a:t>
             </a:fld>
             <a:endParaRPr lang="es-ES"/>
           </a:p>
@@ -1037,7 +1037,7 @@
           <a:p>
             <a:fld id="{14765AC1-0663-8843-9B78-7432E893FF9C}" type="datetimeFigureOut">
               <a:rPr lang="es-ES" smtClean="0"/>
-              <a:t>22/06/2025</a:t>
+              <a:t>07/07/2025</a:t>
             </a:fld>
             <a:endParaRPr lang="es-ES"/>
           </a:p>
@@ -1217,7 +1217,7 @@
           <a:p>
             <a:fld id="{14765AC1-0663-8843-9B78-7432E893FF9C}" type="datetimeFigureOut">
               <a:rPr lang="es-ES" smtClean="0"/>
-              <a:t>22/06/2025</a:t>
+              <a:t>07/07/2025</a:t>
             </a:fld>
             <a:endParaRPr lang="es-ES"/>
           </a:p>
@@ -1387,7 +1387,7 @@
           <a:p>
             <a:fld id="{14765AC1-0663-8843-9B78-7432E893FF9C}" type="datetimeFigureOut">
               <a:rPr lang="es-ES" smtClean="0"/>
-              <a:t>22/06/2025</a:t>
+              <a:t>07/07/2025</a:t>
             </a:fld>
             <a:endParaRPr lang="es-ES"/>
           </a:p>
@@ -1633,7 +1633,7 @@
           <a:p>
             <a:fld id="{14765AC1-0663-8843-9B78-7432E893FF9C}" type="datetimeFigureOut">
               <a:rPr lang="es-ES" smtClean="0"/>
-              <a:t>22/06/2025</a:t>
+              <a:t>07/07/2025</a:t>
             </a:fld>
             <a:endParaRPr lang="es-ES"/>
           </a:p>
@@ -1865,7 +1865,7 @@
           <a:p>
             <a:fld id="{14765AC1-0663-8843-9B78-7432E893FF9C}" type="datetimeFigureOut">
               <a:rPr lang="es-ES" smtClean="0"/>
-              <a:t>22/06/2025</a:t>
+              <a:t>07/07/2025</a:t>
             </a:fld>
             <a:endParaRPr lang="es-ES"/>
           </a:p>
@@ -2232,7 +2232,7 @@
           <a:p>
             <a:fld id="{14765AC1-0663-8843-9B78-7432E893FF9C}" type="datetimeFigureOut">
               <a:rPr lang="es-ES" smtClean="0"/>
-              <a:t>22/06/2025</a:t>
+              <a:t>07/07/2025</a:t>
             </a:fld>
             <a:endParaRPr lang="es-ES"/>
           </a:p>
@@ -2350,7 +2350,7 @@
           <a:p>
             <a:fld id="{14765AC1-0663-8843-9B78-7432E893FF9C}" type="datetimeFigureOut">
               <a:rPr lang="es-ES" smtClean="0"/>
-              <a:t>22/06/2025</a:t>
+              <a:t>07/07/2025</a:t>
             </a:fld>
             <a:endParaRPr lang="es-ES"/>
           </a:p>
@@ -2445,7 +2445,7 @@
           <a:p>
             <a:fld id="{14765AC1-0663-8843-9B78-7432E893FF9C}" type="datetimeFigureOut">
               <a:rPr lang="es-ES" smtClean="0"/>
-              <a:t>22/06/2025</a:t>
+              <a:t>07/07/2025</a:t>
             </a:fld>
             <a:endParaRPr lang="es-ES"/>
           </a:p>
@@ -2722,7 +2722,7 @@
           <a:p>
             <a:fld id="{14765AC1-0663-8843-9B78-7432E893FF9C}" type="datetimeFigureOut">
               <a:rPr lang="es-ES" smtClean="0"/>
-              <a:t>22/06/2025</a:t>
+              <a:t>07/07/2025</a:t>
             </a:fld>
             <a:endParaRPr lang="es-ES"/>
           </a:p>
@@ -2979,7 +2979,7 @@
           <a:p>
             <a:fld id="{14765AC1-0663-8843-9B78-7432E893FF9C}" type="datetimeFigureOut">
               <a:rPr lang="es-ES" smtClean="0"/>
-              <a:t>22/06/2025</a:t>
+              <a:t>07/07/2025</a:t>
             </a:fld>
             <a:endParaRPr lang="es-ES"/>
           </a:p>
@@ -3192,7 +3192,7 @@
           <a:p>
             <a:fld id="{14765AC1-0663-8843-9B78-7432E893FF9C}" type="datetimeFigureOut">
               <a:rPr lang="es-ES" smtClean="0"/>
-              <a:t>22/06/2025</a:t>
+              <a:t>07/07/2025</a:t>
             </a:fld>
             <a:endParaRPr lang="es-ES"/>
           </a:p>
@@ -7377,10 +7377,10 @@
       </p:grpSpPr>
       <p:grpSp>
         <p:nvGrpSpPr>
-          <p:cNvPr id="46" name="Grupo 45">
+          <p:cNvPr id="54" name="Grupo 53">
             <a:extLst>
               <a:ext uri="{FF2B5EF4-FFF2-40B4-BE49-F238E27FC236}">
-                <a16:creationId xmlns:a16="http://schemas.microsoft.com/office/drawing/2014/main" id="{FF0B1A05-5E13-1AAB-A1AB-F27AAADF3BA0}"/>
+                <a16:creationId xmlns:a16="http://schemas.microsoft.com/office/drawing/2014/main" id="{34B9E02C-71D6-1DD9-F5D4-64A08B21D316}"/>
               </a:ext>
             </a:extLst>
           </p:cNvPr>
@@ -7389,18 +7389,18 @@
         </p:nvGrpSpPr>
         <p:grpSpPr>
           <a:xfrm>
-            <a:off x="259234" y="368263"/>
+            <a:off x="193645" y="760149"/>
             <a:ext cx="6664355" cy="4843823"/>
-            <a:chOff x="259234" y="345403"/>
+            <a:chOff x="259234" y="368263"/>
             <a:chExt cx="6664355" cy="4843823"/>
           </a:xfrm>
         </p:grpSpPr>
         <p:grpSp>
           <p:nvGrpSpPr>
-            <p:cNvPr id="44" name="Grupo 43">
+            <p:cNvPr id="52" name="Grupo 51">
               <a:extLst>
                 <a:ext uri="{FF2B5EF4-FFF2-40B4-BE49-F238E27FC236}">
-                  <a16:creationId xmlns:a16="http://schemas.microsoft.com/office/drawing/2014/main" id="{EA740E84-D135-E12F-77FA-021A67714246}"/>
+                  <a16:creationId xmlns:a16="http://schemas.microsoft.com/office/drawing/2014/main" id="{628555D6-FAB5-A50C-5653-692CC10198C1}"/>
                 </a:ext>
               </a:extLst>
             </p:cNvPr>
@@ -7409,18 +7409,18 @@
           </p:nvGrpSpPr>
           <p:grpSpPr>
             <a:xfrm>
-              <a:off x="259234" y="345403"/>
+              <a:off x="259234" y="368263"/>
               <a:ext cx="6664355" cy="4843823"/>
-              <a:chOff x="259234" y="345403"/>
+              <a:chOff x="259234" y="368263"/>
               <a:chExt cx="6664355" cy="4843823"/>
             </a:xfrm>
           </p:grpSpPr>
           <p:grpSp>
             <p:nvGrpSpPr>
-              <p:cNvPr id="42" name="Grupo 41">
+              <p:cNvPr id="50" name="Grupo 49">
                 <a:extLst>
                   <a:ext uri="{FF2B5EF4-FFF2-40B4-BE49-F238E27FC236}">
-                    <a16:creationId xmlns:a16="http://schemas.microsoft.com/office/drawing/2014/main" id="{658ACFDE-C2F3-6843-F35A-F5C2A3FC611D}"/>
+                    <a16:creationId xmlns:a16="http://schemas.microsoft.com/office/drawing/2014/main" id="{122C096C-9E53-DB65-732B-6023652F28FD}"/>
                   </a:ext>
                 </a:extLst>
               </p:cNvPr>
@@ -7429,18 +7429,18 @@
             </p:nvGrpSpPr>
             <p:grpSpPr>
               <a:xfrm>
-                <a:off x="259234" y="345403"/>
+                <a:off x="259234" y="368263"/>
                 <a:ext cx="6664355" cy="4843823"/>
-                <a:chOff x="259234" y="345403"/>
+                <a:chOff x="259234" y="368263"/>
                 <a:chExt cx="6664355" cy="4843823"/>
               </a:xfrm>
             </p:grpSpPr>
             <p:grpSp>
               <p:nvGrpSpPr>
-                <p:cNvPr id="40" name="Grupo 39">
+                <p:cNvPr id="48" name="Grupo 47">
                   <a:extLst>
                     <a:ext uri="{FF2B5EF4-FFF2-40B4-BE49-F238E27FC236}">
-                      <a16:creationId xmlns:a16="http://schemas.microsoft.com/office/drawing/2014/main" id="{744D47A7-1840-1F46-6ADA-1BD5C4BC1BB7}"/>
+                      <a16:creationId xmlns:a16="http://schemas.microsoft.com/office/drawing/2014/main" id="{6B7CCFB0-4488-4778-AF82-0DBBDDBD0AFB}"/>
                     </a:ext>
                   </a:extLst>
                 </p:cNvPr>
@@ -7449,18 +7449,18 @@
               </p:nvGrpSpPr>
               <p:grpSpPr>
                 <a:xfrm>
-                  <a:off x="259234" y="345403"/>
+                  <a:off x="259234" y="368263"/>
                   <a:ext cx="6664355" cy="4843823"/>
-                  <a:chOff x="259234" y="345403"/>
+                  <a:chOff x="259234" y="368263"/>
                   <a:chExt cx="6664355" cy="4843823"/>
                 </a:xfrm>
               </p:grpSpPr>
               <p:grpSp>
                 <p:nvGrpSpPr>
-                  <p:cNvPr id="38" name="Grupo 37">
+                  <p:cNvPr id="46" name="Grupo 45">
                     <a:extLst>
                       <a:ext uri="{FF2B5EF4-FFF2-40B4-BE49-F238E27FC236}">
-                        <a16:creationId xmlns:a16="http://schemas.microsoft.com/office/drawing/2014/main" id="{C62E9E62-7033-950B-60FF-D7EFE75E011F}"/>
+                        <a16:creationId xmlns:a16="http://schemas.microsoft.com/office/drawing/2014/main" id="{FF0B1A05-5E13-1AAB-A1AB-F27AAADF3BA0}"/>
                       </a:ext>
                     </a:extLst>
                   </p:cNvPr>
@@ -7469,7 +7469,7 @@
                 </p:nvGrpSpPr>
                 <p:grpSpPr>
                   <a:xfrm>
-                    <a:off x="259234" y="345403"/>
+                    <a:off x="259234" y="368263"/>
                     <a:ext cx="6664355" cy="4843823"/>
                     <a:chOff x="259234" y="345403"/>
                     <a:chExt cx="6664355" cy="4843823"/>
@@ -7477,10 +7477,10 @@
                 </p:grpSpPr>
                 <p:grpSp>
                   <p:nvGrpSpPr>
-                    <p:cNvPr id="36" name="Grupo 35">
+                    <p:cNvPr id="44" name="Grupo 43">
                       <a:extLst>
                         <a:ext uri="{FF2B5EF4-FFF2-40B4-BE49-F238E27FC236}">
-                          <a16:creationId xmlns:a16="http://schemas.microsoft.com/office/drawing/2014/main" id="{1C7C7C8B-B9F6-4C84-676F-70EC5393E736}"/>
+                          <a16:creationId xmlns:a16="http://schemas.microsoft.com/office/drawing/2014/main" id="{EA740E84-D135-E12F-77FA-021A67714246}"/>
                         </a:ext>
                       </a:extLst>
                     </p:cNvPr>
@@ -7490,17 +7490,17 @@
                   <p:grpSpPr>
                     <a:xfrm>
                       <a:off x="259234" y="345403"/>
-                      <a:ext cx="6664355" cy="4736027"/>
+                      <a:ext cx="6664355" cy="4843823"/>
                       <a:chOff x="259234" y="345403"/>
-                      <a:chExt cx="6664355" cy="4736027"/>
+                      <a:chExt cx="6664355" cy="4843823"/>
                     </a:xfrm>
                   </p:grpSpPr>
                   <p:grpSp>
                     <p:nvGrpSpPr>
-                      <p:cNvPr id="34" name="Grupo 33">
+                      <p:cNvPr id="42" name="Grupo 41">
                         <a:extLst>
                           <a:ext uri="{FF2B5EF4-FFF2-40B4-BE49-F238E27FC236}">
-                            <a16:creationId xmlns:a16="http://schemas.microsoft.com/office/drawing/2014/main" id="{CFFC8AD8-EB19-A207-DD8D-E8E35203C11F}"/>
+                            <a16:creationId xmlns:a16="http://schemas.microsoft.com/office/drawing/2014/main" id="{658ACFDE-C2F3-6843-F35A-F5C2A3FC611D}"/>
                           </a:ext>
                         </a:extLst>
                       </p:cNvPr>
@@ -7510,17 +7510,17 @@
                     <p:grpSpPr>
                       <a:xfrm>
                         <a:off x="259234" y="345403"/>
-                        <a:ext cx="6664355" cy="4736027"/>
+                        <a:ext cx="6664355" cy="4843823"/>
                         <a:chOff x="259234" y="345403"/>
-                        <a:chExt cx="6664355" cy="4736027"/>
+                        <a:chExt cx="6664355" cy="4843823"/>
                       </a:xfrm>
                     </p:grpSpPr>
                     <p:grpSp>
                       <p:nvGrpSpPr>
-                        <p:cNvPr id="32" name="Grupo 31">
+                        <p:cNvPr id="40" name="Grupo 39">
                           <a:extLst>
                             <a:ext uri="{FF2B5EF4-FFF2-40B4-BE49-F238E27FC236}">
-                              <a16:creationId xmlns:a16="http://schemas.microsoft.com/office/drawing/2014/main" id="{0F8682ED-0BCC-3460-07E0-CA60434CA073}"/>
+                              <a16:creationId xmlns:a16="http://schemas.microsoft.com/office/drawing/2014/main" id="{744D47A7-1840-1F46-6ADA-1BD5C4BC1BB7}"/>
                             </a:ext>
                           </a:extLst>
                         </p:cNvPr>
@@ -7530,17 +7530,17 @@
                       <p:grpSpPr>
                         <a:xfrm>
                           <a:off x="259234" y="345403"/>
-                          <a:ext cx="6664355" cy="4736027"/>
+                          <a:ext cx="6664355" cy="4843823"/>
                           <a:chOff x="259234" y="345403"/>
-                          <a:chExt cx="6664355" cy="4736027"/>
+                          <a:chExt cx="6664355" cy="4843823"/>
                         </a:xfrm>
                       </p:grpSpPr>
                       <p:grpSp>
                         <p:nvGrpSpPr>
-                          <p:cNvPr id="30" name="Grupo 29">
+                          <p:cNvPr id="38" name="Grupo 37">
                             <a:extLst>
                               <a:ext uri="{FF2B5EF4-FFF2-40B4-BE49-F238E27FC236}">
-                                <a16:creationId xmlns:a16="http://schemas.microsoft.com/office/drawing/2014/main" id="{850FB823-1391-BF0D-5077-02A9B8C5EC6D}"/>
+                                <a16:creationId xmlns:a16="http://schemas.microsoft.com/office/drawing/2014/main" id="{C62E9E62-7033-950B-60FF-D7EFE75E011F}"/>
                               </a:ext>
                             </a:extLst>
                           </p:cNvPr>
@@ -7550,17 +7550,17 @@
                         <p:grpSpPr>
                           <a:xfrm>
                             <a:off x="259234" y="345403"/>
-                            <a:ext cx="6664355" cy="4736027"/>
+                            <a:ext cx="6664355" cy="4843823"/>
                             <a:chOff x="259234" y="345403"/>
-                            <a:chExt cx="6664355" cy="4736027"/>
+                            <a:chExt cx="6664355" cy="4843823"/>
                           </a:xfrm>
                         </p:grpSpPr>
                         <p:grpSp>
                           <p:nvGrpSpPr>
-                            <p:cNvPr id="28" name="Grupo 27">
+                            <p:cNvPr id="36" name="Grupo 35">
                               <a:extLst>
                                 <a:ext uri="{FF2B5EF4-FFF2-40B4-BE49-F238E27FC236}">
-                                  <a16:creationId xmlns:a16="http://schemas.microsoft.com/office/drawing/2014/main" id="{55E2B875-6F0D-4D40-B200-26843A42ABFC}"/>
+                                  <a16:creationId xmlns:a16="http://schemas.microsoft.com/office/drawing/2014/main" id="{1C7C7C8B-B9F6-4C84-676F-70EC5393E736}"/>
                                 </a:ext>
                               </a:extLst>
                             </p:cNvPr>
@@ -7577,10 +7577,10 @@
                           </p:grpSpPr>
                           <p:grpSp>
                             <p:nvGrpSpPr>
-                              <p:cNvPr id="26" name="Grupo 25">
+                              <p:cNvPr id="34" name="Grupo 33">
                                 <a:extLst>
                                   <a:ext uri="{FF2B5EF4-FFF2-40B4-BE49-F238E27FC236}">
-                                    <a16:creationId xmlns:a16="http://schemas.microsoft.com/office/drawing/2014/main" id="{03D509A1-AA83-9B57-9D2F-635EFD309294}"/>
+                                    <a16:creationId xmlns:a16="http://schemas.microsoft.com/office/drawing/2014/main" id="{CFFC8AD8-EB19-A207-DD8D-E8E35203C11F}"/>
                                   </a:ext>
                                 </a:extLst>
                               </p:cNvPr>
@@ -7597,10 +7597,10 @@
                             </p:grpSpPr>
                             <p:grpSp>
                               <p:nvGrpSpPr>
-                                <p:cNvPr id="24" name="Grupo 23">
+                                <p:cNvPr id="32" name="Grupo 31">
                                   <a:extLst>
                                     <a:ext uri="{FF2B5EF4-FFF2-40B4-BE49-F238E27FC236}">
-                                      <a16:creationId xmlns:a16="http://schemas.microsoft.com/office/drawing/2014/main" id="{8D9C9678-9C45-B8AC-B4F9-768660C5E0E2}"/>
+                                      <a16:creationId xmlns:a16="http://schemas.microsoft.com/office/drawing/2014/main" id="{0F8682ED-0BCC-3460-07E0-CA60434CA073}"/>
                                     </a:ext>
                                   </a:extLst>
                                 </p:cNvPr>
@@ -7617,10 +7617,10 @@
                               </p:grpSpPr>
                               <p:grpSp>
                                 <p:nvGrpSpPr>
-                                  <p:cNvPr id="22" name="Grupo 21">
+                                  <p:cNvPr id="30" name="Grupo 29">
                                     <a:extLst>
                                       <a:ext uri="{FF2B5EF4-FFF2-40B4-BE49-F238E27FC236}">
-                                        <a16:creationId xmlns:a16="http://schemas.microsoft.com/office/drawing/2014/main" id="{729CA3B3-712B-6819-54BF-18B4A95698F2}"/>
+                                        <a16:creationId xmlns:a16="http://schemas.microsoft.com/office/drawing/2014/main" id="{850FB823-1391-BF0D-5077-02A9B8C5EC6D}"/>
                                       </a:ext>
                                     </a:extLst>
                                   </p:cNvPr>
@@ -7637,10 +7637,10 @@
                                 </p:grpSpPr>
                                 <p:grpSp>
                                   <p:nvGrpSpPr>
-                                    <p:cNvPr id="20" name="Grupo 19">
+                                    <p:cNvPr id="28" name="Grupo 27">
                                       <a:extLst>
                                         <a:ext uri="{FF2B5EF4-FFF2-40B4-BE49-F238E27FC236}">
-                                          <a16:creationId xmlns:a16="http://schemas.microsoft.com/office/drawing/2014/main" id="{18CA90C3-E53D-F94C-5CE6-B70A94A7DC9C}"/>
+                                          <a16:creationId xmlns:a16="http://schemas.microsoft.com/office/drawing/2014/main" id="{55E2B875-6F0D-4D40-B200-26843A42ABFC}"/>
                                         </a:ext>
                                       </a:extLst>
                                     </p:cNvPr>
@@ -7657,10 +7657,10 @@
                                   </p:grpSpPr>
                                   <p:grpSp>
                                     <p:nvGrpSpPr>
-                                      <p:cNvPr id="19" name="Grupo 18">
+                                      <p:cNvPr id="26" name="Grupo 25">
                                         <a:extLst>
                                           <a:ext uri="{FF2B5EF4-FFF2-40B4-BE49-F238E27FC236}">
-                                            <a16:creationId xmlns:a16="http://schemas.microsoft.com/office/drawing/2014/main" id="{9650DE05-8191-E930-8AA8-ABB522D95D6A}"/>
+                                            <a16:creationId xmlns:a16="http://schemas.microsoft.com/office/drawing/2014/main" id="{03D509A1-AA83-9B57-9D2F-635EFD309294}"/>
                                           </a:ext>
                                         </a:extLst>
                                       </p:cNvPr>
@@ -7669,18 +7669,18 @@
                                     </p:nvGrpSpPr>
                                     <p:grpSpPr>
                                       <a:xfrm>
-                                        <a:off x="320767" y="345403"/>
-                                        <a:ext cx="6602822" cy="4736027"/>
-                                        <a:chOff x="320767" y="345403"/>
-                                        <a:chExt cx="6602822" cy="4736027"/>
+                                        <a:off x="259234" y="345403"/>
+                                        <a:ext cx="6664355" cy="4736027"/>
+                                        <a:chOff x="259234" y="345403"/>
+                                        <a:chExt cx="6664355" cy="4736027"/>
                                       </a:xfrm>
                                     </p:grpSpPr>
                                     <p:grpSp>
                                       <p:nvGrpSpPr>
-                                        <p:cNvPr id="17" name="Grupo 16">
+                                        <p:cNvPr id="24" name="Grupo 23">
                                           <a:extLst>
                                             <a:ext uri="{FF2B5EF4-FFF2-40B4-BE49-F238E27FC236}">
-                                              <a16:creationId xmlns:a16="http://schemas.microsoft.com/office/drawing/2014/main" id="{1B87EE8F-2B09-8249-C006-40D495A084FD}"/>
+                                              <a16:creationId xmlns:a16="http://schemas.microsoft.com/office/drawing/2014/main" id="{8D9C9678-9C45-B8AC-B4F9-768660C5E0E2}"/>
                                             </a:ext>
                                           </a:extLst>
                                         </p:cNvPr>
@@ -7689,18 +7689,18 @@
                                       </p:nvGrpSpPr>
                                       <p:grpSpPr>
                                         <a:xfrm>
-                                          <a:off x="320767" y="345403"/>
-                                          <a:ext cx="6602822" cy="4736027"/>
-                                          <a:chOff x="308067" y="364453"/>
-                                          <a:chExt cx="6602822" cy="4736027"/>
+                                          <a:off x="259234" y="345403"/>
+                                          <a:ext cx="6664355" cy="4736027"/>
+                                          <a:chOff x="259234" y="345403"/>
+                                          <a:chExt cx="6664355" cy="4736027"/>
                                         </a:xfrm>
                                       </p:grpSpPr>
                                       <p:grpSp>
                                         <p:nvGrpSpPr>
-                                          <p:cNvPr id="8" name="Grupo 7">
+                                          <p:cNvPr id="22" name="Grupo 21">
                                             <a:extLst>
                                               <a:ext uri="{FF2B5EF4-FFF2-40B4-BE49-F238E27FC236}">
-                                                <a16:creationId xmlns:a16="http://schemas.microsoft.com/office/drawing/2014/main" id="{90AE63C3-A7EB-4E10-BEFC-CB035580C7B4}"/>
+                                                <a16:creationId xmlns:a16="http://schemas.microsoft.com/office/drawing/2014/main" id="{729CA3B3-712B-6819-54BF-18B4A95698F2}"/>
                                               </a:ext>
                                             </a:extLst>
                                           </p:cNvPr>
@@ -7709,18 +7709,18 @@
                                         </p:nvGrpSpPr>
                                         <p:grpSpPr>
                                           <a:xfrm>
-                                            <a:off x="308067" y="364453"/>
-                                            <a:ext cx="6602822" cy="4736027"/>
-                                            <a:chOff x="308067" y="364453"/>
-                                            <a:chExt cx="6602822" cy="4736027"/>
+                                            <a:off x="259234" y="345403"/>
+                                            <a:ext cx="6664355" cy="4736027"/>
+                                            <a:chOff x="259234" y="345403"/>
+                                            <a:chExt cx="6664355" cy="4736027"/>
                                           </a:xfrm>
                                         </p:grpSpPr>
                                         <p:grpSp>
                                           <p:nvGrpSpPr>
-                                            <p:cNvPr id="4" name="Grupo 3">
+                                            <p:cNvPr id="20" name="Grupo 19">
                                               <a:extLst>
                                                 <a:ext uri="{FF2B5EF4-FFF2-40B4-BE49-F238E27FC236}">
-                                                  <a16:creationId xmlns:a16="http://schemas.microsoft.com/office/drawing/2014/main" id="{A9086AD5-D504-83A1-7CFF-BB355305AE22}"/>
+                                                  <a16:creationId xmlns:a16="http://schemas.microsoft.com/office/drawing/2014/main" id="{18CA90C3-E53D-F94C-5CE6-B70A94A7DC9C}"/>
                                                 </a:ext>
                                               </a:extLst>
                                             </p:cNvPr>
@@ -7729,18 +7729,18 @@
                                           </p:nvGrpSpPr>
                                           <p:grpSpPr>
                                             <a:xfrm>
-                                              <a:off x="308067" y="364453"/>
-                                              <a:ext cx="6602822" cy="4736027"/>
-                                              <a:chOff x="308067" y="364453"/>
-                                              <a:chExt cx="6602822" cy="4736027"/>
+                                              <a:off x="259234" y="345403"/>
+                                              <a:ext cx="6664355" cy="4736027"/>
+                                              <a:chOff x="259234" y="345403"/>
+                                              <a:chExt cx="6664355" cy="4736027"/>
                                             </a:xfrm>
                                           </p:grpSpPr>
                                           <p:grpSp>
                                             <p:nvGrpSpPr>
-                                              <p:cNvPr id="16" name="Grupo 15">
+                                              <p:cNvPr id="19" name="Grupo 18">
                                                 <a:extLst>
                                                   <a:ext uri="{FF2B5EF4-FFF2-40B4-BE49-F238E27FC236}">
-                                                    <a16:creationId xmlns:a16="http://schemas.microsoft.com/office/drawing/2014/main" id="{B539A685-A4C3-E79B-81A5-B3C7C5BA14E9}"/>
+                                                    <a16:creationId xmlns:a16="http://schemas.microsoft.com/office/drawing/2014/main" id="{9650DE05-8191-E930-8AA8-ABB522D95D6A}"/>
                                                   </a:ext>
                                                 </a:extLst>
                                               </p:cNvPr>
@@ -7749,547 +7749,790 @@
                                             </p:nvGrpSpPr>
                                             <p:grpSpPr>
                                               <a:xfrm>
-                                                <a:off x="308067" y="364453"/>
+                                                <a:off x="320767" y="345403"/>
                                                 <a:ext cx="6602822" cy="4736027"/>
-                                                <a:chOff x="254727" y="501613"/>
+                                                <a:chOff x="320767" y="345403"/>
                                                 <a:chExt cx="6602822" cy="4736027"/>
                                               </a:xfrm>
                                             </p:grpSpPr>
-                                            <p:pic>
-                                              <p:nvPicPr>
-                                                <p:cNvPr id="5" name="Imagen 4" descr="Gráfico, Gráfico de líneas&#10;&#10;El contenido generado por IA puede ser incorrecto.">
+                                            <p:grpSp>
+                                              <p:nvGrpSpPr>
+                                                <p:cNvPr id="17" name="Grupo 16">
                                                   <a:extLst>
                                                     <a:ext uri="{FF2B5EF4-FFF2-40B4-BE49-F238E27FC236}">
-                                                      <a16:creationId xmlns:a16="http://schemas.microsoft.com/office/drawing/2014/main" id="{3E7F435F-E514-0C94-4BE6-392EEE6C13F9}"/>
+                                                      <a16:creationId xmlns:a16="http://schemas.microsoft.com/office/drawing/2014/main" id="{1B87EE8F-2B09-8249-C006-40D495A084FD}"/>
                                                     </a:ext>
                                                   </a:extLst>
                                                 </p:cNvPr>
-                                                <p:cNvPicPr>
-                                                  <a:picLocks noChangeAspect="1"/>
-                                                </p:cNvPicPr>
+                                                <p:cNvGrpSpPr/>
                                                 <p:nvPr/>
-                                              </p:nvPicPr>
-                                              <p:blipFill>
-                                                <a:blip r:embed="rId3"/>
-                                                <a:stretch>
-                                                  <a:fillRect/>
-                                                </a:stretch>
-                                              </p:blipFill>
+                                              </p:nvGrpSpPr>
+                                              <p:grpSpPr>
+                                                <a:xfrm>
+                                                  <a:off x="320767" y="345403"/>
+                                                  <a:ext cx="6602822" cy="4736027"/>
+                                                  <a:chOff x="308067" y="364453"/>
+                                                  <a:chExt cx="6602822" cy="4736027"/>
+                                                </a:xfrm>
+                                              </p:grpSpPr>
+                                              <p:grpSp>
+                                                <p:nvGrpSpPr>
+                                                  <p:cNvPr id="8" name="Grupo 7">
+                                                    <a:extLst>
+                                                      <a:ext uri="{FF2B5EF4-FFF2-40B4-BE49-F238E27FC236}">
+                                                        <a16:creationId xmlns:a16="http://schemas.microsoft.com/office/drawing/2014/main" id="{90AE63C3-A7EB-4E10-BEFC-CB035580C7B4}"/>
+                                                      </a:ext>
+                                                    </a:extLst>
+                                                  </p:cNvPr>
+                                                  <p:cNvGrpSpPr/>
+                                                  <p:nvPr/>
+                                                </p:nvGrpSpPr>
+                                                <p:grpSpPr>
+                                                  <a:xfrm>
+                                                    <a:off x="308067" y="364453"/>
+                                                    <a:ext cx="6602822" cy="4736027"/>
+                                                    <a:chOff x="308067" y="364453"/>
+                                                    <a:chExt cx="6602822" cy="4736027"/>
+                                                  </a:xfrm>
+                                                </p:grpSpPr>
+                                                <p:grpSp>
+                                                  <p:nvGrpSpPr>
+                                                    <p:cNvPr id="4" name="Grupo 3">
+                                                      <a:extLst>
+                                                        <a:ext uri="{FF2B5EF4-FFF2-40B4-BE49-F238E27FC236}">
+                                                          <a16:creationId xmlns:a16="http://schemas.microsoft.com/office/drawing/2014/main" id="{A9086AD5-D504-83A1-7CFF-BB355305AE22}"/>
+                                                        </a:ext>
+                                                      </a:extLst>
+                                                    </p:cNvPr>
+                                                    <p:cNvGrpSpPr/>
+                                                    <p:nvPr/>
+                                                  </p:nvGrpSpPr>
+                                                  <p:grpSpPr>
+                                                    <a:xfrm>
+                                                      <a:off x="308067" y="364453"/>
+                                                      <a:ext cx="6602822" cy="4736027"/>
+                                                      <a:chOff x="308067" y="364453"/>
+                                                      <a:chExt cx="6602822" cy="4736027"/>
+                                                    </a:xfrm>
+                                                  </p:grpSpPr>
+                                                  <p:grpSp>
+                                                    <p:nvGrpSpPr>
+                                                      <p:cNvPr id="16" name="Grupo 15">
+                                                        <a:extLst>
+                                                          <a:ext uri="{FF2B5EF4-FFF2-40B4-BE49-F238E27FC236}">
+                                                            <a16:creationId xmlns:a16="http://schemas.microsoft.com/office/drawing/2014/main" id="{B539A685-A4C3-E79B-81A5-B3C7C5BA14E9}"/>
+                                                          </a:ext>
+                                                        </a:extLst>
+                                                      </p:cNvPr>
+                                                      <p:cNvGrpSpPr/>
+                                                      <p:nvPr/>
+                                                    </p:nvGrpSpPr>
+                                                    <p:grpSpPr>
+                                                      <a:xfrm>
+                                                        <a:off x="308067" y="364453"/>
+                                                        <a:ext cx="6602822" cy="4736027"/>
+                                                        <a:chOff x="254727" y="501613"/>
+                                                        <a:chExt cx="6602822" cy="4736027"/>
+                                                      </a:xfrm>
+                                                    </p:grpSpPr>
+                                                    <p:pic>
+                                                      <p:nvPicPr>
+                                                        <p:cNvPr id="5" name="Imagen 4" descr="Gráfico, Gráfico de líneas&#10;&#10;El contenido generado por IA puede ser incorrecto.">
+                                                          <a:extLst>
+                                                            <a:ext uri="{FF2B5EF4-FFF2-40B4-BE49-F238E27FC236}">
+                                                              <a16:creationId xmlns:a16="http://schemas.microsoft.com/office/drawing/2014/main" id="{3E7F435F-E514-0C94-4BE6-392EEE6C13F9}"/>
+                                                            </a:ext>
+                                                          </a:extLst>
+                                                        </p:cNvPr>
+                                                        <p:cNvPicPr>
+                                                          <a:picLocks noChangeAspect="1"/>
+                                                        </p:cNvPicPr>
+                                                        <p:nvPr/>
+                                                      </p:nvPicPr>
+                                                      <p:blipFill>
+                                                        <a:blip r:embed="rId3"/>
+                                                        <a:stretch>
+                                                          <a:fillRect/>
+                                                        </a:stretch>
+                                                      </p:blipFill>
+                                                      <p:spPr>
+                                                        <a:xfrm>
+                                                          <a:off x="254727" y="656713"/>
+                                                          <a:ext cx="3174273" cy="2105821"/>
+                                                        </a:xfrm>
+                                                        <a:prstGeom prst="rect">
+                                                          <a:avLst/>
+                                                        </a:prstGeom>
+                                                      </p:spPr>
+                                                    </p:pic>
+                                                    <p:pic>
+                                                      <p:nvPicPr>
+                                                        <p:cNvPr id="7" name="Imagen 6" descr="Gráfico, Gráfico de líneas&#10;&#10;El contenido generado por IA puede ser incorrecto.">
+                                                          <a:extLst>
+                                                            <a:ext uri="{FF2B5EF4-FFF2-40B4-BE49-F238E27FC236}">
+                                                              <a16:creationId xmlns:a16="http://schemas.microsoft.com/office/drawing/2014/main" id="{E7D41102-F7CD-A626-988C-52A1112C0ED7}"/>
+                                                            </a:ext>
+                                                          </a:extLst>
+                                                        </p:cNvPr>
+                                                        <p:cNvPicPr>
+                                                          <a:picLocks noChangeAspect="1"/>
+                                                        </p:cNvPicPr>
+                                                        <p:nvPr/>
+                                                      </p:nvPicPr>
+                                                      <p:blipFill>
+                                                        <a:blip r:embed="rId4"/>
+                                                        <a:stretch>
+                                                          <a:fillRect/>
+                                                        </a:stretch>
+                                                      </p:blipFill>
+                                                      <p:spPr>
+                                                        <a:xfrm>
+                                                          <a:off x="3540035" y="656713"/>
+                                                          <a:ext cx="3174273" cy="2105821"/>
+                                                        </a:xfrm>
+                                                        <a:prstGeom prst="rect">
+                                                          <a:avLst/>
+                                                        </a:prstGeom>
+                                                      </p:spPr>
+                                                    </p:pic>
+                                                    <p:pic>
+                                                      <p:nvPicPr>
+                                                        <p:cNvPr id="9" name="Imagen 8" descr="Gráfico, Gráfico de líneas&#10;&#10;El contenido generado por IA puede ser incorrecto.">
+                                                          <a:extLst>
+                                                            <a:ext uri="{FF2B5EF4-FFF2-40B4-BE49-F238E27FC236}">
+                                                              <a16:creationId xmlns:a16="http://schemas.microsoft.com/office/drawing/2014/main" id="{E6DA710D-F4B9-B7BD-61A5-404310A64DFE}"/>
+                                                            </a:ext>
+                                                          </a:extLst>
+                                                        </p:cNvPr>
+                                                        <p:cNvPicPr>
+                                                          <a:picLocks noChangeAspect="1"/>
+                                                        </p:cNvPicPr>
+                                                        <p:nvPr/>
+                                                      </p:nvPicPr>
+                                                      <p:blipFill>
+                                                        <a:blip r:embed="rId5"/>
+                                                        <a:stretch>
+                                                          <a:fillRect/>
+                                                        </a:stretch>
+                                                      </p:blipFill>
+                                                      <p:spPr>
+                                                        <a:xfrm>
+                                                          <a:off x="254727" y="3131820"/>
+                                                          <a:ext cx="3174272" cy="2105820"/>
+                                                        </a:xfrm>
+                                                        <a:prstGeom prst="rect">
+                                                          <a:avLst/>
+                                                        </a:prstGeom>
+                                                      </p:spPr>
+                                                    </p:pic>
+                                                    <p:pic>
+                                                      <p:nvPicPr>
+                                                        <p:cNvPr id="11" name="Imagen 10" descr="Gráfico, Gráfico de líneas&#10;&#10;El contenido generado por IA puede ser incorrecto.">
+                                                          <a:extLst>
+                                                            <a:ext uri="{FF2B5EF4-FFF2-40B4-BE49-F238E27FC236}">
+                                                              <a16:creationId xmlns:a16="http://schemas.microsoft.com/office/drawing/2014/main" id="{939DB6CC-2177-6BFA-FF7D-97851F779119}"/>
+                                                            </a:ext>
+                                                          </a:extLst>
+                                                        </p:cNvPr>
+                                                        <p:cNvPicPr>
+                                                          <a:picLocks noChangeAspect="1"/>
+                                                        </p:cNvPicPr>
+                                                        <p:nvPr/>
+                                                      </p:nvPicPr>
+                                                      <p:blipFill>
+                                                        <a:blip r:embed="rId6"/>
+                                                        <a:stretch>
+                                                          <a:fillRect/>
+                                                        </a:stretch>
+                                                      </p:blipFill>
+                                                      <p:spPr>
+                                                        <a:xfrm>
+                                                          <a:off x="3360419" y="2917634"/>
+                                                          <a:ext cx="3497130" cy="2320006"/>
+                                                        </a:xfrm>
+                                                        <a:prstGeom prst="rect">
+                                                          <a:avLst/>
+                                                        </a:prstGeom>
+                                                      </p:spPr>
+                                                    </p:pic>
+                                                    <p:sp>
+                                                      <p:nvSpPr>
+                                                        <p:cNvPr id="12" name="CuadroTexto 11">
+                                                          <a:extLst>
+                                                            <a:ext uri="{FF2B5EF4-FFF2-40B4-BE49-F238E27FC236}">
+                                                              <a16:creationId xmlns:a16="http://schemas.microsoft.com/office/drawing/2014/main" id="{521C91AC-AD16-CC91-684F-9C98A5D3F297}"/>
+                                                            </a:ext>
+                                                          </a:extLst>
+                                                        </p:cNvPr>
+                                                        <p:cNvSpPr txBox="1"/>
+                                                        <p:nvPr/>
+                                                      </p:nvSpPr>
+                                                      <p:spPr>
+                                                        <a:xfrm>
+                                                          <a:off x="254727" y="501613"/>
+                                                          <a:ext cx="373626" cy="307777"/>
+                                                        </a:xfrm>
+                                                        <a:prstGeom prst="rect">
+                                                          <a:avLst/>
+                                                        </a:prstGeom>
+                                                        <a:noFill/>
+                                                      </p:spPr>
+                                                      <p:txBody>
+                                                        <a:bodyPr wrap="square" rtlCol="0">
+                                                          <a:spAutoFit/>
+                                                        </a:bodyPr>
+                                                        <a:lstStyle/>
+                                                        <a:p>
+                                                          <a:r>
+                                                            <a:rPr lang="es-ES" sz="1400" b="1" dirty="0">
+                                                              <a:latin typeface="Calibri" panose="020F0502020204030204" pitchFamily="34" charset="0"/>
+                                                              <a:cs typeface="Calibri" panose="020F0502020204030204" pitchFamily="34" charset="0"/>
+                                                            </a:rPr>
+                                                            <a:t>A</a:t>
+                                                          </a:r>
+                                                        </a:p>
+                                                      </p:txBody>
+                                                    </p:sp>
+                                                    <p:sp>
+                                                      <p:nvSpPr>
+                                                        <p:cNvPr id="13" name="CuadroTexto 12">
+                                                          <a:extLst>
+                                                            <a:ext uri="{FF2B5EF4-FFF2-40B4-BE49-F238E27FC236}">
+                                                              <a16:creationId xmlns:a16="http://schemas.microsoft.com/office/drawing/2014/main" id="{9F6005FA-78C7-69DE-BC2E-CD32E2ECF2C6}"/>
+                                                            </a:ext>
+                                                          </a:extLst>
+                                                        </p:cNvPr>
+                                                        <p:cNvSpPr txBox="1"/>
+                                                        <p:nvPr/>
+                                                      </p:nvSpPr>
+                                                      <p:spPr>
+                                                        <a:xfrm>
+                                                          <a:off x="3540035" y="501613"/>
+                                                          <a:ext cx="373626" cy="307777"/>
+                                                        </a:xfrm>
+                                                        <a:prstGeom prst="rect">
+                                                          <a:avLst/>
+                                                        </a:prstGeom>
+                                                        <a:noFill/>
+                                                      </p:spPr>
+                                                      <p:txBody>
+                                                        <a:bodyPr wrap="square" rtlCol="0">
+                                                          <a:spAutoFit/>
+                                                        </a:bodyPr>
+                                                        <a:lstStyle/>
+                                                        <a:p>
+                                                          <a:r>
+                                                            <a:rPr lang="es-ES" sz="1400" b="1" dirty="0">
+                                                              <a:latin typeface="Calibri" panose="020F0502020204030204" pitchFamily="34" charset="0"/>
+                                                              <a:cs typeface="Calibri" panose="020F0502020204030204" pitchFamily="34" charset="0"/>
+                                                            </a:rPr>
+                                                            <a:t>B</a:t>
+                                                          </a:r>
+                                                        </a:p>
+                                                      </p:txBody>
+                                                    </p:sp>
+                                                    <p:sp>
+                                                      <p:nvSpPr>
+                                                        <p:cNvPr id="14" name="CuadroTexto 13">
+                                                          <a:extLst>
+                                                            <a:ext uri="{FF2B5EF4-FFF2-40B4-BE49-F238E27FC236}">
+                                                              <a16:creationId xmlns:a16="http://schemas.microsoft.com/office/drawing/2014/main" id="{3DCB8D63-46EA-629E-F7AD-33500ECA0F16}"/>
+                                                            </a:ext>
+                                                          </a:extLst>
+                                                        </p:cNvPr>
+                                                        <p:cNvSpPr txBox="1"/>
+                                                        <p:nvPr/>
+                                                      </p:nvSpPr>
+                                                      <p:spPr>
+                                                        <a:xfrm>
+                                                          <a:off x="254727" y="2977931"/>
+                                                          <a:ext cx="373626" cy="307777"/>
+                                                        </a:xfrm>
+                                                        <a:prstGeom prst="rect">
+                                                          <a:avLst/>
+                                                        </a:prstGeom>
+                                                        <a:noFill/>
+                                                      </p:spPr>
+                                                      <p:txBody>
+                                                        <a:bodyPr wrap="square" rtlCol="0">
+                                                          <a:spAutoFit/>
+                                                        </a:bodyPr>
+                                                        <a:lstStyle/>
+                                                        <a:p>
+                                                          <a:r>
+                                                            <a:rPr lang="es-ES" sz="1400" b="1" dirty="0">
+                                                              <a:latin typeface="Calibri" panose="020F0502020204030204" pitchFamily="34" charset="0"/>
+                                                              <a:cs typeface="Calibri" panose="020F0502020204030204" pitchFamily="34" charset="0"/>
+                                                            </a:rPr>
+                                                            <a:t>C</a:t>
+                                                          </a:r>
+                                                        </a:p>
+                                                      </p:txBody>
+                                                    </p:sp>
+                                                    <p:sp>
+                                                      <p:nvSpPr>
+                                                        <p:cNvPr id="15" name="CuadroTexto 14">
+                                                          <a:extLst>
+                                                            <a:ext uri="{FF2B5EF4-FFF2-40B4-BE49-F238E27FC236}">
+                                                              <a16:creationId xmlns:a16="http://schemas.microsoft.com/office/drawing/2014/main" id="{4518367A-5D7D-0499-9512-DC5469009BC4}"/>
+                                                            </a:ext>
+                                                          </a:extLst>
+                                                        </p:cNvPr>
+                                                        <p:cNvSpPr txBox="1"/>
+                                                        <p:nvPr/>
+                                                      </p:nvSpPr>
+                                                      <p:spPr>
+                                                        <a:xfrm>
+                                                          <a:off x="3540035" y="2977931"/>
+                                                          <a:ext cx="373626" cy="307777"/>
+                                                        </a:xfrm>
+                                                        <a:prstGeom prst="rect">
+                                                          <a:avLst/>
+                                                        </a:prstGeom>
+                                                        <a:noFill/>
+                                                      </p:spPr>
+                                                      <p:txBody>
+                                                        <a:bodyPr wrap="square" rtlCol="0">
+                                                          <a:spAutoFit/>
+                                                        </a:bodyPr>
+                                                        <a:lstStyle/>
+                                                        <a:p>
+                                                          <a:r>
+                                                            <a:rPr lang="es-ES" sz="1400" b="1" dirty="0">
+                                                              <a:latin typeface="Calibri" panose="020F0502020204030204" pitchFamily="34" charset="0"/>
+                                                              <a:cs typeface="Calibri" panose="020F0502020204030204" pitchFamily="34" charset="0"/>
+                                                            </a:rPr>
+                                                            <a:t>D</a:t>
+                                                          </a:r>
+                                                        </a:p>
+                                                      </p:txBody>
+                                                    </p:sp>
+                                                  </p:grpSp>
+                                                  <p:sp>
+                                                    <p:nvSpPr>
+                                                      <p:cNvPr id="3" name="Rectángulo 2">
+                                                        <a:extLst>
+                                                          <a:ext uri="{FF2B5EF4-FFF2-40B4-BE49-F238E27FC236}">
+                                                            <a16:creationId xmlns:a16="http://schemas.microsoft.com/office/drawing/2014/main" id="{2F3DF11D-D5CE-2271-37BC-AB970B82F1C8}"/>
+                                                          </a:ext>
+                                                        </a:extLst>
+                                                      </p:cNvPr>
+                                                      <p:cNvSpPr/>
+                                                      <p:nvPr/>
+                                                    </p:nvSpPr>
+                                                    <p:spPr>
+                                                      <a:xfrm>
+                                                        <a:off x="308067" y="1028700"/>
+                                                        <a:ext cx="123733" cy="939800"/>
+                                                      </a:xfrm>
+                                                      <a:prstGeom prst="rect">
+                                                        <a:avLst/>
+                                                      </a:prstGeom>
+                                                      <a:solidFill>
+                                                        <a:schemeClr val="bg1"/>
+                                                      </a:solidFill>
+                                                      <a:ln>
+                                                        <a:solidFill>
+                                                          <a:schemeClr val="bg1"/>
+                                                        </a:solidFill>
+                                                      </a:ln>
+                                                    </p:spPr>
+                                                    <p:style>
+                                                      <a:lnRef idx="2">
+                                                        <a:schemeClr val="accent1">
+                                                          <a:shade val="15000"/>
+                                                        </a:schemeClr>
+                                                      </a:lnRef>
+                                                      <a:fillRef idx="1">
+                                                        <a:schemeClr val="accent1"/>
+                                                      </a:fillRef>
+                                                      <a:effectRef idx="0">
+                                                        <a:schemeClr val="accent1"/>
+                                                      </a:effectRef>
+                                                      <a:fontRef idx="minor">
+                                                        <a:schemeClr val="lt1"/>
+                                                      </a:fontRef>
+                                                    </p:style>
+                                                    <p:txBody>
+                                                      <a:bodyPr rtlCol="0" anchor="ctr"/>
+                                                      <a:lstStyle/>
+                                                      <a:p>
+                                                        <a:pPr algn="ctr"/>
+                                                        <a:endParaRPr lang="es-ES"/>
+                                                      </a:p>
+                                                    </p:txBody>
+                                                  </p:sp>
+                                                </p:grpSp>
+                                                <p:sp>
+                                                  <p:nvSpPr>
+                                                    <p:cNvPr id="6" name="Rectángulo 5">
+                                                      <a:extLst>
+                                                        <a:ext uri="{FF2B5EF4-FFF2-40B4-BE49-F238E27FC236}">
+                                                          <a16:creationId xmlns:a16="http://schemas.microsoft.com/office/drawing/2014/main" id="{49CF9A85-17B8-7396-7983-33B13952FC28}"/>
+                                                        </a:ext>
+                                                      </a:extLst>
+                                                    </p:cNvPr>
+                                                    <p:cNvSpPr/>
+                                                    <p:nvPr/>
+                                                  </p:nvSpPr>
+                                                  <p:spPr>
+                                                    <a:xfrm>
+                                                      <a:off x="3632200" y="1098550"/>
+                                                      <a:ext cx="107950" cy="895350"/>
+                                                    </a:xfrm>
+                                                    <a:prstGeom prst="rect">
+                                                      <a:avLst/>
+                                                    </a:prstGeom>
+                                                    <a:solidFill>
+                                                      <a:schemeClr val="bg1"/>
+                                                    </a:solidFill>
+                                                    <a:ln>
+                                                      <a:solidFill>
+                                                        <a:schemeClr val="bg1"/>
+                                                      </a:solidFill>
+                                                    </a:ln>
+                                                  </p:spPr>
+                                                  <p:style>
+                                                    <a:lnRef idx="2">
+                                                      <a:schemeClr val="accent1">
+                                                        <a:shade val="15000"/>
+                                                      </a:schemeClr>
+                                                    </a:lnRef>
+                                                    <a:fillRef idx="1">
+                                                      <a:schemeClr val="accent1"/>
+                                                    </a:fillRef>
+                                                    <a:effectRef idx="0">
+                                                      <a:schemeClr val="accent1"/>
+                                                    </a:effectRef>
+                                                    <a:fontRef idx="minor">
+                                                      <a:schemeClr val="lt1"/>
+                                                    </a:fontRef>
+                                                  </p:style>
+                                                  <p:txBody>
+                                                    <a:bodyPr rtlCol="0" anchor="ctr"/>
+                                                    <a:lstStyle/>
+                                                    <a:p>
+                                                      <a:pPr algn="ctr"/>
+                                                      <a:endParaRPr lang="es-ES"/>
+                                                    </a:p>
+                                                  </p:txBody>
+                                                </p:sp>
+                                              </p:grpSp>
+                                              <p:sp>
+                                                <p:nvSpPr>
+                                                  <p:cNvPr id="10" name="Rectángulo 9">
+                                                    <a:extLst>
+                                                      <a:ext uri="{FF2B5EF4-FFF2-40B4-BE49-F238E27FC236}">
+                                                        <a16:creationId xmlns:a16="http://schemas.microsoft.com/office/drawing/2014/main" id="{11646BDE-D4F3-5D76-A4DC-9FC97DEF582C}"/>
+                                                      </a:ext>
+                                                    </a:extLst>
+                                                  </p:cNvPr>
+                                                  <p:cNvSpPr/>
+                                                  <p:nvPr/>
+                                                </p:nvSpPr>
+                                                <p:spPr>
+                                                  <a:xfrm>
+                                                    <a:off x="361950" y="3524250"/>
+                                                    <a:ext cx="82550" cy="952500"/>
+                                                  </a:xfrm>
+                                                  <a:prstGeom prst="rect">
+                                                    <a:avLst/>
+                                                  </a:prstGeom>
+                                                  <a:solidFill>
+                                                    <a:schemeClr val="bg1"/>
+                                                  </a:solidFill>
+                                                  <a:ln>
+                                                    <a:solidFill>
+                                                      <a:schemeClr val="bg1"/>
+                                                    </a:solidFill>
+                                                  </a:ln>
+                                                </p:spPr>
+                                                <p:style>
+                                                  <a:lnRef idx="2">
+                                                    <a:schemeClr val="accent1">
+                                                      <a:shade val="15000"/>
+                                                    </a:schemeClr>
+                                                  </a:lnRef>
+                                                  <a:fillRef idx="1">
+                                                    <a:schemeClr val="accent1"/>
+                                                  </a:fillRef>
+                                                  <a:effectRef idx="0">
+                                                    <a:schemeClr val="accent1"/>
+                                                  </a:effectRef>
+                                                  <a:fontRef idx="minor">
+                                                    <a:schemeClr val="lt1"/>
+                                                  </a:fontRef>
+                                                </p:style>
+                                                <p:txBody>
+                                                  <a:bodyPr rtlCol="0" anchor="ctr"/>
+                                                  <a:lstStyle/>
+                                                  <a:p>
+                                                    <a:pPr algn="ctr"/>
+                                                    <a:endParaRPr lang="es-ES"/>
+                                                  </a:p>
+                                                </p:txBody>
+                                              </p:sp>
+                                            </p:grpSp>
+                                            <p:sp>
+                                              <p:nvSpPr>
+                                                <p:cNvPr id="18" name="Rectángulo 17">
+                                                  <a:extLst>
+                                                    <a:ext uri="{FF2B5EF4-FFF2-40B4-BE49-F238E27FC236}">
+                                                      <a16:creationId xmlns:a16="http://schemas.microsoft.com/office/drawing/2014/main" id="{952DCE0A-AE47-8464-8399-EDC2016FF227}"/>
+                                                    </a:ext>
+                                                  </a:extLst>
+                                                </p:cNvPr>
+                                                <p:cNvSpPr/>
+                                                <p:nvPr/>
+                                              </p:nvSpPr>
                                               <p:spPr>
                                                 <a:xfrm>
-                                                  <a:off x="254727" y="656713"/>
-                                                  <a:ext cx="3174273" cy="2105821"/>
+                                                  <a:off x="3429000" y="3714750"/>
+                                                  <a:ext cx="139700" cy="1066800"/>
                                                 </a:xfrm>
                                                 <a:prstGeom prst="rect">
                                                   <a:avLst/>
                                                 </a:prstGeom>
+                                                <a:solidFill>
+                                                  <a:schemeClr val="bg1"/>
+                                                </a:solidFill>
+                                                <a:ln>
+                                                  <a:solidFill>
+                                                    <a:schemeClr val="bg1"/>
+                                                  </a:solidFill>
+                                                </a:ln>
                                               </p:spPr>
-                                            </p:pic>
-                                            <p:pic>
-                                              <p:nvPicPr>
-                                                <p:cNvPr id="7" name="Imagen 6" descr="Gráfico, Gráfico de líneas&#10;&#10;El contenido generado por IA puede ser incorrecto.">
-                                                  <a:extLst>
-                                                    <a:ext uri="{FF2B5EF4-FFF2-40B4-BE49-F238E27FC236}">
-                                                      <a16:creationId xmlns:a16="http://schemas.microsoft.com/office/drawing/2014/main" id="{E7D41102-F7CD-A626-988C-52A1112C0ED7}"/>
-                                                    </a:ext>
-                                                  </a:extLst>
-                                                </p:cNvPr>
-                                                <p:cNvPicPr>
-                                                  <a:picLocks noChangeAspect="1"/>
-                                                </p:cNvPicPr>
-                                                <p:nvPr/>
-                                              </p:nvPicPr>
-                                              <p:blipFill>
-                                                <a:blip r:embed="rId4"/>
-                                                <a:stretch>
-                                                  <a:fillRect/>
-                                                </a:stretch>
-                                              </p:blipFill>
-                                              <p:spPr>
-                                                <a:xfrm>
-                                                  <a:off x="3540035" y="656713"/>
-                                                  <a:ext cx="3174273" cy="2105821"/>
-                                                </a:xfrm>
-                                                <a:prstGeom prst="rect">
-                                                  <a:avLst/>
-                                                </a:prstGeom>
-                                              </p:spPr>
-                                            </p:pic>
-                                            <p:pic>
-                                              <p:nvPicPr>
-                                                <p:cNvPr id="9" name="Imagen 8" descr="Gráfico, Gráfico de líneas&#10;&#10;El contenido generado por IA puede ser incorrecto.">
-                                                  <a:extLst>
-                                                    <a:ext uri="{FF2B5EF4-FFF2-40B4-BE49-F238E27FC236}">
-                                                      <a16:creationId xmlns:a16="http://schemas.microsoft.com/office/drawing/2014/main" id="{E6DA710D-F4B9-B7BD-61A5-404310A64DFE}"/>
-                                                    </a:ext>
-                                                  </a:extLst>
-                                                </p:cNvPr>
-                                                <p:cNvPicPr>
-                                                  <a:picLocks noChangeAspect="1"/>
-                                                </p:cNvPicPr>
-                                                <p:nvPr/>
-                                              </p:nvPicPr>
-                                              <p:blipFill>
-                                                <a:blip r:embed="rId5"/>
-                                                <a:stretch>
-                                                  <a:fillRect/>
-                                                </a:stretch>
-                                              </p:blipFill>
-                                              <p:spPr>
-                                                <a:xfrm>
-                                                  <a:off x="254727" y="3131820"/>
-                                                  <a:ext cx="3174272" cy="2105820"/>
-                                                </a:xfrm>
-                                                <a:prstGeom prst="rect">
-                                                  <a:avLst/>
-                                                </a:prstGeom>
-                                              </p:spPr>
-                                            </p:pic>
-                                            <p:pic>
-                                              <p:nvPicPr>
-                                                <p:cNvPr id="11" name="Imagen 10" descr="Gráfico, Gráfico de líneas&#10;&#10;El contenido generado por IA puede ser incorrecto.">
-                                                  <a:extLst>
-                                                    <a:ext uri="{FF2B5EF4-FFF2-40B4-BE49-F238E27FC236}">
-                                                      <a16:creationId xmlns:a16="http://schemas.microsoft.com/office/drawing/2014/main" id="{939DB6CC-2177-6BFA-FF7D-97851F779119}"/>
-                                                    </a:ext>
-                                                  </a:extLst>
-                                                </p:cNvPr>
-                                                <p:cNvPicPr>
-                                                  <a:picLocks noChangeAspect="1"/>
-                                                </p:cNvPicPr>
-                                                <p:nvPr/>
-                                              </p:nvPicPr>
-                                              <p:blipFill>
-                                                <a:blip r:embed="rId6"/>
-                                                <a:stretch>
-                                                  <a:fillRect/>
-                                                </a:stretch>
-                                              </p:blipFill>
-                                              <p:spPr>
-                                                <a:xfrm>
-                                                  <a:off x="3360419" y="2917634"/>
-                                                  <a:ext cx="3497130" cy="2320006"/>
-                                                </a:xfrm>
-                                                <a:prstGeom prst="rect">
-                                                  <a:avLst/>
-                                                </a:prstGeom>
-                                              </p:spPr>
-                                            </p:pic>
-                                            <p:sp>
-                                              <p:nvSpPr>
-                                                <p:cNvPr id="12" name="CuadroTexto 11">
-                                                  <a:extLst>
-                                                    <a:ext uri="{FF2B5EF4-FFF2-40B4-BE49-F238E27FC236}">
-                                                      <a16:creationId xmlns:a16="http://schemas.microsoft.com/office/drawing/2014/main" id="{521C91AC-AD16-CC91-684F-9C98A5D3F297}"/>
-                                                    </a:ext>
-                                                  </a:extLst>
-                                                </p:cNvPr>
-                                                <p:cNvSpPr txBox="1"/>
-                                                <p:nvPr/>
-                                              </p:nvSpPr>
-                                              <p:spPr>
-                                                <a:xfrm>
-                                                  <a:off x="254727" y="501613"/>
-                                                  <a:ext cx="373626" cy="307777"/>
-                                                </a:xfrm>
-                                                <a:prstGeom prst="rect">
-                                                  <a:avLst/>
-                                                </a:prstGeom>
-                                                <a:noFill/>
-                                              </p:spPr>
+                                              <p:style>
+                                                <a:lnRef idx="2">
+                                                  <a:schemeClr val="accent1">
+                                                    <a:shade val="15000"/>
+                                                  </a:schemeClr>
+                                                </a:lnRef>
+                                                <a:fillRef idx="1">
+                                                  <a:schemeClr val="accent1"/>
+                                                </a:fillRef>
+                                                <a:effectRef idx="0">
+                                                  <a:schemeClr val="accent1"/>
+                                                </a:effectRef>
+                                                <a:fontRef idx="minor">
+                                                  <a:schemeClr val="lt1"/>
+                                                </a:fontRef>
+                                              </p:style>
                                               <p:txBody>
-                                                <a:bodyPr wrap="square" rtlCol="0">
-                                                  <a:spAutoFit/>
-                                                </a:bodyPr>
+                                                <a:bodyPr rtlCol="0" anchor="ctr"/>
                                                 <a:lstStyle/>
                                                 <a:p>
-                                                  <a:r>
-                                                    <a:rPr lang="es-ES" sz="1400" b="1" dirty="0">
-                                                      <a:latin typeface="Calibri" panose="020F0502020204030204" pitchFamily="34" charset="0"/>
-                                                      <a:cs typeface="Calibri" panose="020F0502020204030204" pitchFamily="34" charset="0"/>
-                                                    </a:rPr>
-                                                    <a:t>A</a:t>
-                                                  </a:r>
-                                                </a:p>
-                                              </p:txBody>
-                                            </p:sp>
-                                            <p:sp>
-                                              <p:nvSpPr>
-                                                <p:cNvPr id="13" name="CuadroTexto 12">
-                                                  <a:extLst>
-                                                    <a:ext uri="{FF2B5EF4-FFF2-40B4-BE49-F238E27FC236}">
-                                                      <a16:creationId xmlns:a16="http://schemas.microsoft.com/office/drawing/2014/main" id="{9F6005FA-78C7-69DE-BC2E-CD32E2ECF2C6}"/>
-                                                    </a:ext>
-                                                  </a:extLst>
-                                                </p:cNvPr>
-                                                <p:cNvSpPr txBox="1"/>
-                                                <p:nvPr/>
-                                              </p:nvSpPr>
-                                              <p:spPr>
-                                                <a:xfrm>
-                                                  <a:off x="3540035" y="501613"/>
-                                                  <a:ext cx="373626" cy="307777"/>
-                                                </a:xfrm>
-                                                <a:prstGeom prst="rect">
-                                                  <a:avLst/>
-                                                </a:prstGeom>
-                                                <a:noFill/>
-                                              </p:spPr>
-                                              <p:txBody>
-                                                <a:bodyPr wrap="square" rtlCol="0">
-                                                  <a:spAutoFit/>
-                                                </a:bodyPr>
-                                                <a:lstStyle/>
-                                                <a:p>
-                                                  <a:r>
-                                                    <a:rPr lang="es-ES" sz="1400" b="1" dirty="0">
-                                                      <a:latin typeface="Calibri" panose="020F0502020204030204" pitchFamily="34" charset="0"/>
-                                                      <a:cs typeface="Calibri" panose="020F0502020204030204" pitchFamily="34" charset="0"/>
-                                                    </a:rPr>
-                                                    <a:t>B</a:t>
-                                                  </a:r>
-                                                </a:p>
-                                              </p:txBody>
-                                            </p:sp>
-                                            <p:sp>
-                                              <p:nvSpPr>
-                                                <p:cNvPr id="14" name="CuadroTexto 13">
-                                                  <a:extLst>
-                                                    <a:ext uri="{FF2B5EF4-FFF2-40B4-BE49-F238E27FC236}">
-                                                      <a16:creationId xmlns:a16="http://schemas.microsoft.com/office/drawing/2014/main" id="{3DCB8D63-46EA-629E-F7AD-33500ECA0F16}"/>
-                                                    </a:ext>
-                                                  </a:extLst>
-                                                </p:cNvPr>
-                                                <p:cNvSpPr txBox="1"/>
-                                                <p:nvPr/>
-                                              </p:nvSpPr>
-                                              <p:spPr>
-                                                <a:xfrm>
-                                                  <a:off x="254727" y="2977931"/>
-                                                  <a:ext cx="373626" cy="307777"/>
-                                                </a:xfrm>
-                                                <a:prstGeom prst="rect">
-                                                  <a:avLst/>
-                                                </a:prstGeom>
-                                                <a:noFill/>
-                                              </p:spPr>
-                                              <p:txBody>
-                                                <a:bodyPr wrap="square" rtlCol="0">
-                                                  <a:spAutoFit/>
-                                                </a:bodyPr>
-                                                <a:lstStyle/>
-                                                <a:p>
-                                                  <a:r>
-                                                    <a:rPr lang="es-ES" sz="1400" b="1" dirty="0">
-                                                      <a:latin typeface="Calibri" panose="020F0502020204030204" pitchFamily="34" charset="0"/>
-                                                      <a:cs typeface="Calibri" panose="020F0502020204030204" pitchFamily="34" charset="0"/>
-                                                    </a:rPr>
-                                                    <a:t>C</a:t>
-                                                  </a:r>
-                                                </a:p>
-                                              </p:txBody>
-                                            </p:sp>
-                                            <p:sp>
-                                              <p:nvSpPr>
-                                                <p:cNvPr id="15" name="CuadroTexto 14">
-                                                  <a:extLst>
-                                                    <a:ext uri="{FF2B5EF4-FFF2-40B4-BE49-F238E27FC236}">
-                                                      <a16:creationId xmlns:a16="http://schemas.microsoft.com/office/drawing/2014/main" id="{4518367A-5D7D-0499-9512-DC5469009BC4}"/>
-                                                    </a:ext>
-                                                  </a:extLst>
-                                                </p:cNvPr>
-                                                <p:cNvSpPr txBox="1"/>
-                                                <p:nvPr/>
-                                              </p:nvSpPr>
-                                              <p:spPr>
-                                                <a:xfrm>
-                                                  <a:off x="3540035" y="2977931"/>
-                                                  <a:ext cx="373626" cy="307777"/>
-                                                </a:xfrm>
-                                                <a:prstGeom prst="rect">
-                                                  <a:avLst/>
-                                                </a:prstGeom>
-                                                <a:noFill/>
-                                              </p:spPr>
-                                              <p:txBody>
-                                                <a:bodyPr wrap="square" rtlCol="0">
-                                                  <a:spAutoFit/>
-                                                </a:bodyPr>
-                                                <a:lstStyle/>
-                                                <a:p>
-                                                  <a:r>
-                                                    <a:rPr lang="es-ES" sz="1400" b="1" dirty="0">
-                                                      <a:latin typeface="Calibri" panose="020F0502020204030204" pitchFamily="34" charset="0"/>
-                                                      <a:cs typeface="Calibri" panose="020F0502020204030204" pitchFamily="34" charset="0"/>
-                                                    </a:rPr>
-                                                    <a:t>D</a:t>
-                                                  </a:r>
+                                                  <a:pPr algn="ctr"/>
+                                                  <a:endParaRPr lang="es-ES"/>
                                                 </a:p>
                                               </p:txBody>
                                             </p:sp>
                                           </p:grpSp>
                                           <p:sp>
                                             <p:nvSpPr>
-                                              <p:cNvPr id="3" name="Rectángulo 2">
+                                              <p:cNvPr id="2" name="CuadroTexto 1">
                                                 <a:extLst>
                                                   <a:ext uri="{FF2B5EF4-FFF2-40B4-BE49-F238E27FC236}">
-                                                    <a16:creationId xmlns:a16="http://schemas.microsoft.com/office/drawing/2014/main" id="{2F3DF11D-D5CE-2271-37BC-AB970B82F1C8}"/>
+                                                    <a16:creationId xmlns:a16="http://schemas.microsoft.com/office/drawing/2014/main" id="{DDC22A7E-5695-8D07-C5F8-F20E0E45F2E6}"/>
                                                   </a:ext>
                                                 </a:extLst>
                                               </p:cNvPr>
-                                              <p:cNvSpPr/>
+                                              <p:cNvSpPr txBox="1"/>
                                               <p:nvPr/>
                                             </p:nvSpPr>
                                             <p:spPr>
-                                              <a:xfrm>
-                                                <a:off x="308067" y="1028700"/>
-                                                <a:ext cx="123733" cy="939800"/>
+                                              <a:xfrm rot="16200000">
+                                                <a:off x="15655" y="1253229"/>
+                                                <a:ext cx="717990" cy="230832"/>
                                               </a:xfrm>
                                               <a:prstGeom prst="rect">
                                                 <a:avLst/>
                                               </a:prstGeom>
-                                              <a:solidFill>
-                                                <a:schemeClr val="bg1"/>
-                                              </a:solidFill>
-                                              <a:ln>
-                                                <a:solidFill>
-                                                  <a:schemeClr val="bg1"/>
-                                                </a:solidFill>
-                                              </a:ln>
+                                              <a:noFill/>
                                             </p:spPr>
-                                            <p:style>
-                                              <a:lnRef idx="2">
-                                                <a:schemeClr val="accent1">
-                                                  <a:shade val="15000"/>
-                                                </a:schemeClr>
-                                              </a:lnRef>
-                                              <a:fillRef idx="1">
-                                                <a:schemeClr val="accent1"/>
-                                              </a:fillRef>
-                                              <a:effectRef idx="0">
-                                                <a:schemeClr val="accent1"/>
-                                              </a:effectRef>
-                                              <a:fontRef idx="minor">
-                                                <a:schemeClr val="lt1"/>
-                                              </a:fontRef>
-                                            </p:style>
                                             <p:txBody>
-                                              <a:bodyPr rtlCol="0" anchor="ctr"/>
+                                              <a:bodyPr wrap="square" rtlCol="0">
+                                                <a:spAutoFit/>
+                                              </a:bodyPr>
                                               <a:lstStyle/>
                                               <a:p>
-                                                <a:pPr algn="ctr"/>
-                                                <a:endParaRPr lang="es-ES"/>
+                                                <a:r>
+                                                  <a:rPr lang="es-ES" sz="900" dirty="0"/>
+                                                  <a:t>Precisión</a:t>
+                                                </a:r>
                                               </a:p>
                                             </p:txBody>
                                           </p:sp>
                                         </p:grpSp>
                                         <p:sp>
                                           <p:nvSpPr>
-                                            <p:cNvPr id="6" name="Rectángulo 5">
+                                            <p:cNvPr id="21" name="CuadroTexto 20">
                                               <a:extLst>
                                                 <a:ext uri="{FF2B5EF4-FFF2-40B4-BE49-F238E27FC236}">
-                                                  <a16:creationId xmlns:a16="http://schemas.microsoft.com/office/drawing/2014/main" id="{49CF9A85-17B8-7396-7983-33B13952FC28}"/>
+                                                  <a16:creationId xmlns:a16="http://schemas.microsoft.com/office/drawing/2014/main" id="{6A289051-5192-C4AB-DE1A-F9BB106EDA25}"/>
                                                 </a:ext>
                                               </a:extLst>
                                             </p:cNvPr>
-                                            <p:cNvSpPr/>
+                                            <p:cNvSpPr txBox="1"/>
                                             <p:nvPr/>
                                           </p:nvSpPr>
                                           <p:spPr>
-                                            <a:xfrm>
-                                              <a:off x="3632200" y="1098550"/>
-                                              <a:ext cx="107950" cy="895350"/>
+                                            <a:xfrm rot="16200000">
+                                              <a:off x="3266493" y="1253229"/>
+                                              <a:ext cx="717990" cy="230832"/>
                                             </a:xfrm>
                                             <a:prstGeom prst="rect">
                                               <a:avLst/>
                                             </a:prstGeom>
-                                            <a:solidFill>
-                                              <a:schemeClr val="bg1"/>
-                                            </a:solidFill>
-                                            <a:ln>
-                                              <a:solidFill>
-                                                <a:schemeClr val="bg1"/>
-                                              </a:solidFill>
-                                            </a:ln>
+                                            <a:noFill/>
                                           </p:spPr>
-                                          <p:style>
-                                            <a:lnRef idx="2">
-                                              <a:schemeClr val="accent1">
-                                                <a:shade val="15000"/>
-                                              </a:schemeClr>
-                                            </a:lnRef>
-                                            <a:fillRef idx="1">
-                                              <a:schemeClr val="accent1"/>
-                                            </a:fillRef>
-                                            <a:effectRef idx="0">
-                                              <a:schemeClr val="accent1"/>
-                                            </a:effectRef>
-                                            <a:fontRef idx="minor">
-                                              <a:schemeClr val="lt1"/>
-                                            </a:fontRef>
-                                          </p:style>
                                           <p:txBody>
-                                            <a:bodyPr rtlCol="0" anchor="ctr"/>
+                                            <a:bodyPr wrap="square" rtlCol="0">
+                                              <a:spAutoFit/>
+                                            </a:bodyPr>
                                             <a:lstStyle/>
                                             <a:p>
-                                              <a:pPr algn="ctr"/>
-                                              <a:endParaRPr lang="es-ES"/>
+                                              <a:r>
+                                                <a:rPr lang="es-ES" sz="900" dirty="0"/>
+                                                <a:t>Precisión</a:t>
+                                              </a:r>
                                             </a:p>
                                           </p:txBody>
                                         </p:sp>
                                       </p:grpSp>
                                       <p:sp>
                                         <p:nvSpPr>
-                                          <p:cNvPr id="10" name="Rectángulo 9">
+                                          <p:cNvPr id="23" name="CuadroTexto 22">
                                             <a:extLst>
                                               <a:ext uri="{FF2B5EF4-FFF2-40B4-BE49-F238E27FC236}">
-                                                <a16:creationId xmlns:a16="http://schemas.microsoft.com/office/drawing/2014/main" id="{11646BDE-D4F3-5D76-A4DC-9FC97DEF582C}"/>
+                                                <a16:creationId xmlns:a16="http://schemas.microsoft.com/office/drawing/2014/main" id="{416E21FB-7E9C-4EEB-12D6-6C34B5FA6E89}"/>
                                               </a:ext>
                                             </a:extLst>
                                           </p:cNvPr>
-                                          <p:cNvSpPr/>
+                                          <p:cNvSpPr txBox="1"/>
                                           <p:nvPr/>
                                         </p:nvSpPr>
                                         <p:spPr>
-                                          <a:xfrm>
-                                            <a:off x="361950" y="3524250"/>
-                                            <a:ext cx="82550" cy="952500"/>
+                                          <a:xfrm rot="16200000">
+                                            <a:off x="33169" y="3990048"/>
+                                            <a:ext cx="717990" cy="230832"/>
                                           </a:xfrm>
                                           <a:prstGeom prst="rect">
                                             <a:avLst/>
                                           </a:prstGeom>
-                                          <a:solidFill>
-                                            <a:schemeClr val="bg1"/>
-                                          </a:solidFill>
-                                          <a:ln>
-                                            <a:solidFill>
-                                              <a:schemeClr val="bg1"/>
-                                            </a:solidFill>
-                                          </a:ln>
+                                          <a:noFill/>
                                         </p:spPr>
-                                        <p:style>
-                                          <a:lnRef idx="2">
-                                            <a:schemeClr val="accent1">
-                                              <a:shade val="15000"/>
-                                            </a:schemeClr>
-                                          </a:lnRef>
-                                          <a:fillRef idx="1">
-                                            <a:schemeClr val="accent1"/>
-                                          </a:fillRef>
-                                          <a:effectRef idx="0">
-                                            <a:schemeClr val="accent1"/>
-                                          </a:effectRef>
-                                          <a:fontRef idx="minor">
-                                            <a:schemeClr val="lt1"/>
-                                          </a:fontRef>
-                                        </p:style>
                                         <p:txBody>
-                                          <a:bodyPr rtlCol="0" anchor="ctr"/>
+                                          <a:bodyPr wrap="square" rtlCol="0">
+                                            <a:spAutoFit/>
+                                          </a:bodyPr>
                                           <a:lstStyle/>
                                           <a:p>
-                                            <a:pPr algn="ctr"/>
-                                            <a:endParaRPr lang="es-ES"/>
+                                            <a:r>
+                                              <a:rPr lang="es-ES" sz="900" dirty="0"/>
+                                              <a:t>Precisión</a:t>
+                                            </a:r>
                                           </a:p>
                                         </p:txBody>
                                       </p:sp>
                                     </p:grpSp>
                                     <p:sp>
                                       <p:nvSpPr>
-                                        <p:cNvPr id="18" name="Rectángulo 17">
+                                        <p:cNvPr id="25" name="CuadroTexto 24">
                                           <a:extLst>
                                             <a:ext uri="{FF2B5EF4-FFF2-40B4-BE49-F238E27FC236}">
-                                              <a16:creationId xmlns:a16="http://schemas.microsoft.com/office/drawing/2014/main" id="{952DCE0A-AE47-8464-8399-EDC2016FF227}"/>
+                                              <a16:creationId xmlns:a16="http://schemas.microsoft.com/office/drawing/2014/main" id="{A8478B34-E890-41B0-9DF4-BA9415C058D9}"/>
                                             </a:ext>
                                           </a:extLst>
                                         </p:cNvPr>
-                                        <p:cNvSpPr/>
+                                        <p:cNvSpPr txBox="1"/>
                                         <p:nvPr/>
                                       </p:nvSpPr>
                                       <p:spPr>
-                                        <a:xfrm>
-                                          <a:off x="3429000" y="3714750"/>
-                                          <a:ext cx="139700" cy="1066800"/>
+                                        <a:xfrm rot="16200000">
+                                          <a:off x="3151077" y="3990048"/>
+                                          <a:ext cx="717990" cy="230832"/>
                                         </a:xfrm>
                                         <a:prstGeom prst="rect">
                                           <a:avLst/>
                                         </a:prstGeom>
-                                        <a:solidFill>
-                                          <a:schemeClr val="bg1"/>
-                                        </a:solidFill>
-                                        <a:ln>
-                                          <a:solidFill>
-                                            <a:schemeClr val="bg1"/>
-                                          </a:solidFill>
-                                        </a:ln>
+                                        <a:noFill/>
                                       </p:spPr>
-                                      <p:style>
-                                        <a:lnRef idx="2">
-                                          <a:schemeClr val="accent1">
-                                            <a:shade val="15000"/>
-                                          </a:schemeClr>
-                                        </a:lnRef>
-                                        <a:fillRef idx="1">
-                                          <a:schemeClr val="accent1"/>
-                                        </a:fillRef>
-                                        <a:effectRef idx="0">
-                                          <a:schemeClr val="accent1"/>
-                                        </a:effectRef>
-                                        <a:fontRef idx="minor">
-                                          <a:schemeClr val="lt1"/>
-                                        </a:fontRef>
-                                      </p:style>
                                       <p:txBody>
-                                        <a:bodyPr rtlCol="0" anchor="ctr"/>
+                                        <a:bodyPr wrap="square" rtlCol="0">
+                                          <a:spAutoFit/>
+                                        </a:bodyPr>
                                         <a:lstStyle/>
                                         <a:p>
-                                          <a:pPr algn="ctr"/>
-                                          <a:endParaRPr lang="es-ES"/>
+                                          <a:r>
+                                            <a:rPr lang="es-ES" sz="900" dirty="0"/>
+                                            <a:t>Precisión</a:t>
+                                          </a:r>
                                         </a:p>
                                       </p:txBody>
                                     </p:sp>
                                   </p:grpSp>
                                   <p:sp>
                                     <p:nvSpPr>
-                                      <p:cNvPr id="2" name="CuadroTexto 1">
+                                      <p:cNvPr id="27" name="Rectángulo 26">
                                         <a:extLst>
                                           <a:ext uri="{FF2B5EF4-FFF2-40B4-BE49-F238E27FC236}">
-                                            <a16:creationId xmlns:a16="http://schemas.microsoft.com/office/drawing/2014/main" id="{DDC22A7E-5695-8D07-C5F8-F20E0E45F2E6}"/>
+                                            <a16:creationId xmlns:a16="http://schemas.microsoft.com/office/drawing/2014/main" id="{3D1891B5-2B71-F4F2-0177-B4402C5888E2}"/>
                                           </a:ext>
                                         </a:extLst>
                                       </p:cNvPr>
-                                      <p:cNvSpPr txBox="1"/>
+                                      <p:cNvSpPr/>
                                       <p:nvPr/>
                                     </p:nvSpPr>
                                     <p:spPr>
-                                      <a:xfrm rot="16200000">
-                                        <a:off x="15655" y="1253229"/>
-                                        <a:ext cx="717990" cy="230832"/>
+                                      <a:xfrm>
+                                        <a:off x="1805940" y="2461260"/>
+                                        <a:ext cx="396240" cy="145064"/>
                                       </a:xfrm>
                                       <a:prstGeom prst="rect">
                                         <a:avLst/>
                                       </a:prstGeom>
-                                      <a:noFill/>
+                                      <a:solidFill>
+                                        <a:schemeClr val="bg1"/>
+                                      </a:solidFill>
+                                      <a:ln>
+                                        <a:solidFill>
+                                          <a:schemeClr val="bg1"/>
+                                        </a:solidFill>
+                                      </a:ln>
                                     </p:spPr>
+                                    <p:style>
+                                      <a:lnRef idx="2">
+                                        <a:schemeClr val="accent1">
+                                          <a:shade val="15000"/>
+                                        </a:schemeClr>
+                                      </a:lnRef>
+                                      <a:fillRef idx="1">
+                                        <a:schemeClr val="accent1"/>
+                                      </a:fillRef>
+                                      <a:effectRef idx="0">
+                                        <a:schemeClr val="accent1"/>
+                                      </a:effectRef>
+                                      <a:fontRef idx="minor">
+                                        <a:schemeClr val="lt1"/>
+                                      </a:fontRef>
+                                    </p:style>
                                     <p:txBody>
-                                      <a:bodyPr wrap="square" rtlCol="0">
-                                        <a:spAutoFit/>
-                                      </a:bodyPr>
+                                      <a:bodyPr rtlCol="0" anchor="ctr"/>
                                       <a:lstStyle/>
                                       <a:p>
-                                        <a:r>
-                                          <a:rPr lang="es-ES" sz="900" dirty="0"/>
-                                          <a:t>Precisión</a:t>
-                                        </a:r>
+                                        <a:pPr algn="ctr"/>
+                                        <a:endParaRPr lang="es-ES"/>
                                       </a:p>
                                     </p:txBody>
                                   </p:sp>
                                 </p:grpSp>
                                 <p:sp>
                                   <p:nvSpPr>
-                                    <p:cNvPr id="21" name="CuadroTexto 20">
+                                    <p:cNvPr id="29" name="CuadroTexto 28">
                                       <a:extLst>
                                         <a:ext uri="{FF2B5EF4-FFF2-40B4-BE49-F238E27FC236}">
-                                          <a16:creationId xmlns:a16="http://schemas.microsoft.com/office/drawing/2014/main" id="{6A289051-5192-C4AB-DE1A-F9BB106EDA25}"/>
+                                          <a16:creationId xmlns:a16="http://schemas.microsoft.com/office/drawing/2014/main" id="{15658B4D-65D9-C4B3-995B-CA8FD6A7AC2B}"/>
                                         </a:ext>
                                       </a:extLst>
                                     </p:cNvPr>
@@ -8297,8 +8540,8 @@
                                     <p:nvPr/>
                                   </p:nvSpPr>
                                   <p:spPr>
-                                    <a:xfrm rot="16200000">
-                                      <a:off x="3266493" y="1253229"/>
+                                    <a:xfrm>
+                                      <a:off x="1645065" y="2375492"/>
                                       <a:ext cx="717990" cy="230832"/>
                                     </a:xfrm>
                                     <a:prstGeom prst="rect">
@@ -8312,9 +8555,10 @@
                                     </a:bodyPr>
                                     <a:lstStyle/>
                                     <a:p>
+                                      <a:pPr algn="ctr"/>
                                       <a:r>
                                         <a:rPr lang="es-ES" sz="900" dirty="0"/>
-                                        <a:t>Precisión</a:t>
+                                        <a:t>C</a:t>
                                       </a:r>
                                     </a:p>
                                   </p:txBody>
@@ -8322,46 +8566,65 @@
                               </p:grpSp>
                               <p:sp>
                                 <p:nvSpPr>
-                                  <p:cNvPr id="23" name="CuadroTexto 22">
+                                  <p:cNvPr id="31" name="Rectángulo 30">
                                     <a:extLst>
                                       <a:ext uri="{FF2B5EF4-FFF2-40B4-BE49-F238E27FC236}">
-                                        <a16:creationId xmlns:a16="http://schemas.microsoft.com/office/drawing/2014/main" id="{416E21FB-7E9C-4EEB-12D6-6C34B5FA6E89}"/>
+                                        <a16:creationId xmlns:a16="http://schemas.microsoft.com/office/drawing/2014/main" id="{8E064468-2930-868F-7A86-B4122C8DD5B6}"/>
                                       </a:ext>
                                     </a:extLst>
                                   </p:cNvPr>
-                                  <p:cNvSpPr txBox="1"/>
+                                  <p:cNvSpPr/>
                                   <p:nvPr/>
                                 </p:nvSpPr>
                                 <p:spPr>
-                                  <a:xfrm rot="16200000">
-                                    <a:off x="33169" y="3990048"/>
-                                    <a:ext cx="717990" cy="230832"/>
+                                  <a:xfrm>
+                                    <a:off x="5135880" y="2377440"/>
+                                    <a:ext cx="419100" cy="205740"/>
                                   </a:xfrm>
                                   <a:prstGeom prst="rect">
                                     <a:avLst/>
                                   </a:prstGeom>
-                                  <a:noFill/>
+                                  <a:solidFill>
+                                    <a:schemeClr val="bg1"/>
+                                  </a:solidFill>
+                                  <a:ln>
+                                    <a:solidFill>
+                                      <a:schemeClr val="bg1"/>
+                                    </a:solidFill>
+                                  </a:ln>
                                 </p:spPr>
+                                <p:style>
+                                  <a:lnRef idx="2">
+                                    <a:schemeClr val="accent1">
+                                      <a:shade val="15000"/>
+                                    </a:schemeClr>
+                                  </a:lnRef>
+                                  <a:fillRef idx="1">
+                                    <a:schemeClr val="accent1"/>
+                                  </a:fillRef>
+                                  <a:effectRef idx="0">
+                                    <a:schemeClr val="accent1"/>
+                                  </a:effectRef>
+                                  <a:fontRef idx="minor">
+                                    <a:schemeClr val="lt1"/>
+                                  </a:fontRef>
+                                </p:style>
                                 <p:txBody>
-                                  <a:bodyPr wrap="square" rtlCol="0">
-                                    <a:spAutoFit/>
-                                  </a:bodyPr>
+                                  <a:bodyPr rtlCol="0" anchor="ctr"/>
                                   <a:lstStyle/>
                                   <a:p>
-                                    <a:r>
-                                      <a:rPr lang="es-ES" sz="900" dirty="0"/>
-                                      <a:t>Precisión</a:t>
-                                    </a:r>
+                                    <a:pPr algn="ctr"/>
+                                    <a:endParaRPr lang="es-ES"/>
                                   </a:p>
                                 </p:txBody>
                               </p:sp>
                             </p:grpSp>
                             <p:sp>
                               <p:nvSpPr>
-                                <p:cNvPr id="25" name="CuadroTexto 24">
+                                <p:cNvPr id="33" name="CuadroTexto 32">
                                   <a:extLst>
                                     <a:ext uri="{FF2B5EF4-FFF2-40B4-BE49-F238E27FC236}">
-                                      <a16:creationId xmlns:a16="http://schemas.microsoft.com/office/drawing/2014/main" id="{A8478B34-E890-41B0-9DF4-BA9415C058D9}"/>
+                                      <a16:creationId xmlns:a16="http://schemas.microsoft.com/office/drawing/2014/main" id="{64BB5AF4-B5B2-EF13-CB94-884BC34024C6}"/>
                                     </a:ext>
                                   </a:extLst>
                                 </p:cNvPr>
@@ -8369,8 +8632,8 @@
                                 <p:nvPr/>
                               </p:nvSpPr>
                               <p:spPr>
-                                <a:xfrm rot="16200000">
-                                  <a:off x="3151077" y="3990048"/>
+                                <a:xfrm>
+                                  <a:off x="4986435" y="2375492"/>
                                   <a:ext cx="717990" cy="230832"/>
                                 </a:xfrm>
                                 <a:prstGeom prst="rect">
@@ -8384,9 +8647,10 @@
                                 </a:bodyPr>
                                 <a:lstStyle/>
                                 <a:p>
+                                  <a:pPr algn="ctr"/>
                                   <a:r>
                                     <a:rPr lang="es-ES" sz="900" dirty="0"/>
-                                    <a:t>Precisión</a:t>
+                                    <a:t>C</a:t>
                                   </a:r>
                                 </a:p>
                               </p:txBody>
@@ -8394,10 +8658,10 @@
                           </p:grpSp>
                           <p:sp>
                             <p:nvSpPr>
-                              <p:cNvPr id="27" name="Rectángulo 26">
+                              <p:cNvPr id="35" name="Rectángulo 34">
                                 <a:extLst>
                                   <a:ext uri="{FF2B5EF4-FFF2-40B4-BE49-F238E27FC236}">
-                                    <a16:creationId xmlns:a16="http://schemas.microsoft.com/office/drawing/2014/main" id="{3D1891B5-2B71-F4F2-0177-B4402C5888E2}"/>
+                                    <a16:creationId xmlns:a16="http://schemas.microsoft.com/office/drawing/2014/main" id="{C881F36E-BC3E-F5DA-8CFD-84801A106E69}"/>
                                   </a:ext>
                                 </a:extLst>
                               </p:cNvPr>
@@ -8406,8 +8670,8 @@
                             </p:nvSpPr>
                             <p:spPr>
                               <a:xfrm>
-                                <a:off x="1805940" y="2461260"/>
-                                <a:ext cx="396240" cy="145064"/>
+                                <a:off x="1485900" y="4937760"/>
+                                <a:ext cx="1097280" cy="128430"/>
                               </a:xfrm>
                               <a:prstGeom prst="rect">
                                 <a:avLst/>
@@ -8449,10 +8713,10 @@
                         </p:grpSp>
                         <p:sp>
                           <p:nvSpPr>
-                            <p:cNvPr id="29" name="CuadroTexto 28">
+                            <p:cNvPr id="37" name="CuadroTexto 36">
                               <a:extLst>
                                 <a:ext uri="{FF2B5EF4-FFF2-40B4-BE49-F238E27FC236}">
-                                  <a16:creationId xmlns:a16="http://schemas.microsoft.com/office/drawing/2014/main" id="{15658B4D-65D9-C4B3-995B-CA8FD6A7AC2B}"/>
+                                  <a16:creationId xmlns:a16="http://schemas.microsoft.com/office/drawing/2014/main" id="{C8E50545-98D8-611B-3D7D-72618414A817}"/>
                                 </a:ext>
                               </a:extLst>
                             </p:cNvPr>
@@ -8461,7 +8725,7 @@
                           </p:nvSpPr>
                           <p:spPr>
                             <a:xfrm>
-                              <a:off x="1645065" y="2375492"/>
+                              <a:off x="1675545" y="4958394"/>
                               <a:ext cx="717990" cy="230832"/>
                             </a:xfrm>
                             <a:prstGeom prst="rect">
@@ -8478,7 +8742,7 @@
                               <a:pPr algn="ctr"/>
                               <a:r>
                                 <a:rPr lang="es-ES" sz="900" dirty="0"/>
-                                <a:t>C</a:t>
+                                <a:t>MTRY</a:t>
                               </a:r>
                             </a:p>
                           </p:txBody>
@@ -8486,10 +8750,10 @@
                       </p:grpSp>
                       <p:sp>
                         <p:nvSpPr>
-                          <p:cNvPr id="31" name="Rectángulo 30">
+                          <p:cNvPr id="39" name="Rectángulo 38">
                             <a:extLst>
                               <a:ext uri="{FF2B5EF4-FFF2-40B4-BE49-F238E27FC236}">
-                                <a16:creationId xmlns:a16="http://schemas.microsoft.com/office/drawing/2014/main" id="{8E064468-2930-868F-7A86-B4122C8DD5B6}"/>
+                                <a16:creationId xmlns:a16="http://schemas.microsoft.com/office/drawing/2014/main" id="{1D764EE0-66B9-E57C-08EB-34CB2D2EEA4B}"/>
                               </a:ext>
                             </a:extLst>
                           </p:cNvPr>
@@ -8498,8 +8762,8 @@
                         </p:nvSpPr>
                         <p:spPr>
                           <a:xfrm>
-                            <a:off x="5135880" y="2377440"/>
-                            <a:ext cx="419100" cy="205740"/>
+                            <a:off x="4849817" y="4858305"/>
+                            <a:ext cx="781905" cy="128430"/>
                           </a:xfrm>
                           <a:prstGeom prst="rect">
                             <a:avLst/>
@@ -8541,10 +8805,10 @@
                     </p:grpSp>
                     <p:sp>
                       <p:nvSpPr>
-                        <p:cNvPr id="33" name="CuadroTexto 32">
+                        <p:cNvPr id="41" name="CuadroTexto 40">
                           <a:extLst>
                             <a:ext uri="{FF2B5EF4-FFF2-40B4-BE49-F238E27FC236}">
-                              <a16:creationId xmlns:a16="http://schemas.microsoft.com/office/drawing/2014/main" id="{64BB5AF4-B5B2-EF13-CB94-884BC34024C6}"/>
+                              <a16:creationId xmlns:a16="http://schemas.microsoft.com/office/drawing/2014/main" id="{1B3A81C1-1B6E-2986-5C91-492D72918F62}"/>
                             </a:ext>
                           </a:extLst>
                         </p:cNvPr>
@@ -8553,8 +8817,8 @@
                       </p:nvSpPr>
                       <p:spPr>
                         <a:xfrm>
-                          <a:off x="4986435" y="2375492"/>
-                          <a:ext cx="717990" cy="230832"/>
+                          <a:off x="4862406" y="4949153"/>
+                          <a:ext cx="900015" cy="230832"/>
                         </a:xfrm>
                         <a:prstGeom prst="rect">
                           <a:avLst/>
@@ -8570,7 +8834,7 @@
                           <a:pPr algn="ctr"/>
                           <a:r>
                             <a:rPr lang="es-ES" sz="900" dirty="0"/>
-                            <a:t>C</a:t>
+                            <a:t>Iteraciones</a:t>
                           </a:r>
                         </a:p>
                       </p:txBody>
@@ -8578,10 +8842,10 @@
                   </p:grpSp>
                   <p:sp>
                     <p:nvSpPr>
-                      <p:cNvPr id="35" name="Rectángulo 34">
+                      <p:cNvPr id="43" name="Rectángulo 42">
                         <a:extLst>
                           <a:ext uri="{FF2B5EF4-FFF2-40B4-BE49-F238E27FC236}">
-                            <a16:creationId xmlns:a16="http://schemas.microsoft.com/office/drawing/2014/main" id="{C881F36E-BC3E-F5DA-8CFD-84801A106E69}"/>
+                            <a16:creationId xmlns:a16="http://schemas.microsoft.com/office/drawing/2014/main" id="{D17968A8-7C19-5090-0961-99813472F33B}"/>
                           </a:ext>
                         </a:extLst>
                       </p:cNvPr>
@@ -8590,8 +8854,8 @@
                     </p:nvSpPr>
                     <p:spPr>
                       <a:xfrm>
-                        <a:off x="1485900" y="4937760"/>
-                        <a:ext cx="1097280" cy="128430"/>
+                        <a:off x="4853940" y="2788920"/>
+                        <a:ext cx="853440" cy="128430"/>
                       </a:xfrm>
                       <a:prstGeom prst="rect">
                         <a:avLst/>
@@ -8633,10 +8897,10 @@
                 </p:grpSp>
                 <p:sp>
                   <p:nvSpPr>
-                    <p:cNvPr id="37" name="CuadroTexto 36">
+                    <p:cNvPr id="45" name="CuadroTexto 44">
                       <a:extLst>
                         <a:ext uri="{FF2B5EF4-FFF2-40B4-BE49-F238E27FC236}">
-                          <a16:creationId xmlns:a16="http://schemas.microsoft.com/office/drawing/2014/main" id="{C8E50545-98D8-611B-3D7D-72618414A817}"/>
+                          <a16:creationId xmlns:a16="http://schemas.microsoft.com/office/drawing/2014/main" id="{BEB77EB9-CDFC-90E2-7637-CB6FA822B252}"/>
                         </a:ext>
                       </a:extLst>
                     </p:cNvPr>
@@ -8645,8 +8909,8 @@
                   </p:nvSpPr>
                   <p:spPr>
                     <a:xfrm>
-                      <a:off x="1675545" y="4958394"/>
-                      <a:ext cx="717990" cy="230832"/>
+                      <a:off x="4862406" y="2697172"/>
+                      <a:ext cx="900015" cy="230832"/>
                     </a:xfrm>
                     <a:prstGeom prst="rect">
                       <a:avLst/>
@@ -8662,7 +8926,7 @@
                       <a:pPr algn="ctr"/>
                       <a:r>
                         <a:rPr lang="es-ES" sz="900" dirty="0"/>
-                        <a:t>MTRY</a:t>
+                        <a:t>Profundidad</a:t>
                       </a:r>
                     </a:p>
                   </p:txBody>
@@ -8670,65 +8934,47 @@
               </p:grpSp>
               <p:sp>
                 <p:nvSpPr>
-                  <p:cNvPr id="39" name="Rectángulo 38">
+                  <p:cNvPr id="47" name="CuadroTexto 46">
                     <a:extLst>
                       <a:ext uri="{FF2B5EF4-FFF2-40B4-BE49-F238E27FC236}">
-                        <a16:creationId xmlns:a16="http://schemas.microsoft.com/office/drawing/2014/main" id="{1D764EE0-66B9-E57C-08EB-34CB2D2EEA4B}"/>
+                        <a16:creationId xmlns:a16="http://schemas.microsoft.com/office/drawing/2014/main" id="{590B1BF1-B73D-BF1C-BFFE-F780096A2836}"/>
                       </a:ext>
                     </a:extLst>
                   </p:cNvPr>
-                  <p:cNvSpPr/>
+                  <p:cNvSpPr txBox="1"/>
                   <p:nvPr/>
                 </p:nvSpPr>
                 <p:spPr>
                   <a:xfrm>
-                    <a:off x="4849817" y="4858305"/>
-                    <a:ext cx="781905" cy="128430"/>
+                    <a:off x="1370874" y="429819"/>
+                    <a:ext cx="1266371" cy="246221"/>
                   </a:xfrm>
                   <a:prstGeom prst="rect">
                     <a:avLst/>
                   </a:prstGeom>
-                  <a:solidFill>
-                    <a:schemeClr val="bg1"/>
-                  </a:solidFill>
-                  <a:ln>
-                    <a:solidFill>
-                      <a:schemeClr val="bg1"/>
-                    </a:solidFill>
-                  </a:ln>
+                  <a:noFill/>
                 </p:spPr>
-                <p:style>
-                  <a:lnRef idx="2">
-                    <a:schemeClr val="accent1">
-                      <a:shade val="15000"/>
-                    </a:schemeClr>
-                  </a:lnRef>
-                  <a:fillRef idx="1">
-                    <a:schemeClr val="accent1"/>
-                  </a:fillRef>
-                  <a:effectRef idx="0">
-                    <a:schemeClr val="accent1"/>
-                  </a:effectRef>
-                  <a:fontRef idx="minor">
-                    <a:schemeClr val="lt1"/>
-                  </a:fontRef>
-                </p:style>
                 <p:txBody>
-                  <a:bodyPr rtlCol="0" anchor="ctr"/>
+                  <a:bodyPr wrap="square" rtlCol="0">
+                    <a:spAutoFit/>
+                  </a:bodyPr>
                   <a:lstStyle/>
                   <a:p>
                     <a:pPr algn="ctr"/>
-                    <a:endParaRPr lang="es-ES"/>
+                    <a:r>
+                      <a:rPr lang="es-ES" sz="1000" b="1" dirty="0"/>
+                      <a:t>SVM LINEAL</a:t>
+                    </a:r>
                   </a:p>
                 </p:txBody>
               </p:sp>
             </p:grpSp>
             <p:sp>
               <p:nvSpPr>
-                <p:cNvPr id="41" name="CuadroTexto 40">
+                <p:cNvPr id="49" name="CuadroTexto 48">
                   <a:extLst>
                     <a:ext uri="{FF2B5EF4-FFF2-40B4-BE49-F238E27FC236}">
-                      <a16:creationId xmlns:a16="http://schemas.microsoft.com/office/drawing/2014/main" id="{1B3A81C1-1B6E-2986-5C91-492D72918F62}"/>
+                      <a16:creationId xmlns:a16="http://schemas.microsoft.com/office/drawing/2014/main" id="{7013A3B6-4F9A-D271-5D39-C5149673A470}"/>
                     </a:ext>
                   </a:extLst>
                 </p:cNvPr>
@@ -8737,8 +8983,8 @@
               </p:nvSpPr>
               <p:spPr>
                 <a:xfrm>
-                  <a:off x="4862406" y="4949153"/>
-                  <a:ext cx="900015" cy="230832"/>
+                  <a:off x="4679227" y="424808"/>
+                  <a:ext cx="1266371" cy="246221"/>
                 </a:xfrm>
                 <a:prstGeom prst="rect">
                   <a:avLst/>
@@ -8753,8 +8999,8 @@
                 <a:p>
                   <a:pPr algn="ctr"/>
                   <a:r>
-                    <a:rPr lang="es-ES" sz="900" dirty="0"/>
-                    <a:t>Iteraciones</a:t>
+                    <a:rPr lang="es-ES" sz="1000" b="1" dirty="0"/>
+                    <a:t>SVM RADIAL</a:t>
                   </a:r>
                 </a:p>
               </p:txBody>
@@ -8762,65 +9008,47 @@
           </p:grpSp>
           <p:sp>
             <p:nvSpPr>
-              <p:cNvPr id="43" name="Rectángulo 42">
+              <p:cNvPr id="51" name="CuadroTexto 50">
                 <a:extLst>
                   <a:ext uri="{FF2B5EF4-FFF2-40B4-BE49-F238E27FC236}">
-                    <a16:creationId xmlns:a16="http://schemas.microsoft.com/office/drawing/2014/main" id="{D17968A8-7C19-5090-0961-99813472F33B}"/>
+                    <a16:creationId xmlns:a16="http://schemas.microsoft.com/office/drawing/2014/main" id="{50EF25C0-FFF7-7388-4492-9E4F30D01F23}"/>
                   </a:ext>
                 </a:extLst>
               </p:cNvPr>
-              <p:cNvSpPr/>
+              <p:cNvSpPr txBox="1"/>
               <p:nvPr/>
             </p:nvSpPr>
             <p:spPr>
               <a:xfrm>
-                <a:off x="4853940" y="2788920"/>
-                <a:ext cx="853440" cy="128430"/>
+                <a:off x="1239518" y="2867939"/>
+                <a:ext cx="1529081" cy="246221"/>
               </a:xfrm>
               <a:prstGeom prst="rect">
                 <a:avLst/>
               </a:prstGeom>
-              <a:solidFill>
-                <a:schemeClr val="bg1"/>
-              </a:solidFill>
-              <a:ln>
-                <a:solidFill>
-                  <a:schemeClr val="bg1"/>
-                </a:solidFill>
-              </a:ln>
+              <a:noFill/>
             </p:spPr>
-            <p:style>
-              <a:lnRef idx="2">
-                <a:schemeClr val="accent1">
-                  <a:shade val="15000"/>
-                </a:schemeClr>
-              </a:lnRef>
-              <a:fillRef idx="1">
-                <a:schemeClr val="accent1"/>
-              </a:fillRef>
-              <a:effectRef idx="0">
-                <a:schemeClr val="accent1"/>
-              </a:effectRef>
-              <a:fontRef idx="minor">
-                <a:schemeClr val="lt1"/>
-              </a:fontRef>
-            </p:style>
             <p:txBody>
-              <a:bodyPr rtlCol="0" anchor="ctr"/>
+              <a:bodyPr wrap="square" rtlCol="0">
+                <a:spAutoFit/>
+              </a:bodyPr>
               <a:lstStyle/>
               <a:p>
                 <a:pPr algn="ctr"/>
-                <a:endParaRPr lang="es-ES"/>
+                <a:r>
+                  <a:rPr lang="es-ES" sz="1000" b="1" dirty="0"/>
+                  <a:t>BOSQUE ALEATORIO</a:t>
+                </a:r>
               </a:p>
             </p:txBody>
           </p:sp>
         </p:grpSp>
         <p:sp>
           <p:nvSpPr>
-            <p:cNvPr id="45" name="CuadroTexto 44">
+            <p:cNvPr id="53" name="CuadroTexto 52">
               <a:extLst>
                 <a:ext uri="{FF2B5EF4-FFF2-40B4-BE49-F238E27FC236}">
-                  <a16:creationId xmlns:a16="http://schemas.microsoft.com/office/drawing/2014/main" id="{BEB77EB9-CDFC-90E2-7637-CB6FA822B252}"/>
+                  <a16:creationId xmlns:a16="http://schemas.microsoft.com/office/drawing/2014/main" id="{F238D3E1-E2FC-F42E-4994-8CE7560B9688}"/>
                 </a:ext>
               </a:extLst>
             </p:cNvPr>
@@ -8829,8 +9057,8 @@
           </p:nvSpPr>
           <p:spPr>
             <a:xfrm>
-              <a:off x="4862406" y="2697172"/>
-              <a:ext cx="900015" cy="230832"/>
+              <a:off x="4060857" y="2596921"/>
+              <a:ext cx="2304156" cy="246221"/>
             </a:xfrm>
             <a:prstGeom prst="rect">
               <a:avLst/>
@@ -8845,8 +9073,8 @@
             <a:p>
               <a:pPr algn="ctr"/>
               <a:r>
-                <a:rPr lang="es-ES" sz="900" dirty="0"/>
-                <a:t>Profundidad</a:t>
+                <a:rPr lang="es-ES" sz="1000" b="1" dirty="0"/>
+                <a:t>POTENCIACIÓN DEL GRADIENTE</a:t>
               </a:r>
             </a:p>
           </p:txBody>
